--- a/exam/exam.pptx
+++ b/exam/exam.pptx
@@ -10,10 +10,11 @@
     <p:sldId id="258" r:id="rId4"/>
     <p:sldId id="259" r:id="rId5"/>
     <p:sldId id="260" r:id="rId6"/>
-    <p:sldId id="261" r:id="rId7"/>
-    <p:sldId id="262" r:id="rId8"/>
-    <p:sldId id="263" r:id="rId9"/>
-    <p:sldId id="264" r:id="rId10"/>
+    <p:sldId id="265" r:id="rId7"/>
+    <p:sldId id="261" r:id="rId8"/>
+    <p:sldId id="262" r:id="rId9"/>
+    <p:sldId id="263" r:id="rId10"/>
+    <p:sldId id="264" r:id="rId11"/>
   </p:sldIdLst>
   <p:sldSz cx="12192000" cy="6858000"/>
   <p:notesSz cx="6858000" cy="9144000"/>
@@ -112,6 +113,11 @@
       </a:defRPr>
     </a:lvl9pPr>
   </p:defaultTextStyle>
+  <p:extLst>
+    <p:ext uri="{EFAFB233-063F-42B5-8137-9DF3F51BA10A}">
+      <p15:sldGuideLst xmlns:p15="http://schemas.microsoft.com/office/powerpoint/2012/main"/>
+    </p:ext>
+  </p:extLst>
 </p:presentation>
 </file>
 
@@ -264,7 +270,7 @@
           <a:p>
             <a:fld id="{BE7E296C-ABD0-495D-8AB8-4FC63D775AEA}" type="datetimeFigureOut">
               <a:rPr lang="es-ES" smtClean="0"/>
-              <a:t>14/10/2026</a:t>
+              <a:t>16/10/2026</a:t>
             </a:fld>
             <a:endParaRPr lang="es-ES"/>
           </a:p>
@@ -464,7 +470,7 @@
           <a:p>
             <a:fld id="{BE7E296C-ABD0-495D-8AB8-4FC63D775AEA}" type="datetimeFigureOut">
               <a:rPr lang="es-ES" smtClean="0"/>
-              <a:t>14/10/2026</a:t>
+              <a:t>16/10/2026</a:t>
             </a:fld>
             <a:endParaRPr lang="es-ES"/>
           </a:p>
@@ -674,7 +680,7 @@
           <a:p>
             <a:fld id="{BE7E296C-ABD0-495D-8AB8-4FC63D775AEA}" type="datetimeFigureOut">
               <a:rPr lang="es-ES" smtClean="0"/>
-              <a:t>14/10/2026</a:t>
+              <a:t>16/10/2026</a:t>
             </a:fld>
             <a:endParaRPr lang="es-ES"/>
           </a:p>
@@ -874,7 +880,7 @@
           <a:p>
             <a:fld id="{BE7E296C-ABD0-495D-8AB8-4FC63D775AEA}" type="datetimeFigureOut">
               <a:rPr lang="es-ES" smtClean="0"/>
-              <a:t>14/10/2026</a:t>
+              <a:t>16/10/2026</a:t>
             </a:fld>
             <a:endParaRPr lang="es-ES"/>
           </a:p>
@@ -1150,7 +1156,7 @@
           <a:p>
             <a:fld id="{BE7E296C-ABD0-495D-8AB8-4FC63D775AEA}" type="datetimeFigureOut">
               <a:rPr lang="es-ES" smtClean="0"/>
-              <a:t>14/10/2026</a:t>
+              <a:t>16/10/2026</a:t>
             </a:fld>
             <a:endParaRPr lang="es-ES"/>
           </a:p>
@@ -1418,7 +1424,7 @@
           <a:p>
             <a:fld id="{BE7E296C-ABD0-495D-8AB8-4FC63D775AEA}" type="datetimeFigureOut">
               <a:rPr lang="es-ES" smtClean="0"/>
-              <a:t>14/10/2026</a:t>
+              <a:t>16/10/2026</a:t>
             </a:fld>
             <a:endParaRPr lang="es-ES"/>
           </a:p>
@@ -1833,7 +1839,7 @@
           <a:p>
             <a:fld id="{BE7E296C-ABD0-495D-8AB8-4FC63D775AEA}" type="datetimeFigureOut">
               <a:rPr lang="es-ES" smtClean="0"/>
-              <a:t>14/10/2026</a:t>
+              <a:t>16/10/2026</a:t>
             </a:fld>
             <a:endParaRPr lang="es-ES"/>
           </a:p>
@@ -1975,7 +1981,7 @@
           <a:p>
             <a:fld id="{BE7E296C-ABD0-495D-8AB8-4FC63D775AEA}" type="datetimeFigureOut">
               <a:rPr lang="es-ES" smtClean="0"/>
-              <a:t>14/10/2026</a:t>
+              <a:t>16/10/2026</a:t>
             </a:fld>
             <a:endParaRPr lang="es-ES"/>
           </a:p>
@@ -2088,7 +2094,7 @@
           <a:p>
             <a:fld id="{BE7E296C-ABD0-495D-8AB8-4FC63D775AEA}" type="datetimeFigureOut">
               <a:rPr lang="es-ES" smtClean="0"/>
-              <a:t>14/10/2026</a:t>
+              <a:t>16/10/2026</a:t>
             </a:fld>
             <a:endParaRPr lang="es-ES"/>
           </a:p>
@@ -2401,7 +2407,7 @@
           <a:p>
             <a:fld id="{BE7E296C-ABD0-495D-8AB8-4FC63D775AEA}" type="datetimeFigureOut">
               <a:rPr lang="es-ES" smtClean="0"/>
-              <a:t>14/10/2026</a:t>
+              <a:t>16/10/2026</a:t>
             </a:fld>
             <a:endParaRPr lang="es-ES"/>
           </a:p>
@@ -2690,7 +2696,7 @@
           <a:p>
             <a:fld id="{BE7E296C-ABD0-495D-8AB8-4FC63D775AEA}" type="datetimeFigureOut">
               <a:rPr lang="es-ES" smtClean="0"/>
-              <a:t>14/10/2026</a:t>
+              <a:t>16/10/2026</a:t>
             </a:fld>
             <a:endParaRPr lang="es-ES"/>
           </a:p>
@@ -2933,7 +2939,7 @@
           <a:p>
             <a:fld id="{BE7E296C-ABD0-495D-8AB8-4FC63D775AEA}" type="datetimeFigureOut">
               <a:rPr lang="es-ES" smtClean="0"/>
-              <a:t>14/10/2026</a:t>
+              <a:t>16/10/2026</a:t>
             </a:fld>
             <a:endParaRPr lang="es-ES"/>
           </a:p>
@@ -3525,6 +3531,212 @@
 </p:sld>
 </file>
 
+<file path=ppt/slides/slide10.xml><?xml version="1.0" encoding="utf-8"?>
+<p:sld xmlns:a="http://schemas.openxmlformats.org/drawingml/2006/main" xmlns:r="http://schemas.openxmlformats.org/officeDocument/2006/relationships" xmlns:p="http://schemas.openxmlformats.org/presentationml/2006/main">
+  <p:cSld>
+    <p:spTree>
+      <p:nvGrpSpPr>
+        <p:cNvPr id="1" name="">
+          <a:extLst>
+            <a:ext uri="{FF2B5EF4-FFF2-40B4-BE49-F238E27FC236}">
+              <a16:creationId xmlns:a16="http://schemas.microsoft.com/office/drawing/2014/main" id="{2A5F38E9-E043-1AC8-7389-9529CCD0C61A}"/>
+            </a:ext>
+          </a:extLst>
+        </p:cNvPr>
+        <p:cNvGrpSpPr/>
+        <p:nvPr/>
+      </p:nvGrpSpPr>
+      <p:grpSpPr>
+        <a:xfrm>
+          <a:off x="0" y="0"/>
+          <a:ext cx="0" cy="0"/>
+          <a:chOff x="0" y="0"/>
+          <a:chExt cx="0" cy="0"/>
+        </a:xfrm>
+      </p:grpSpPr>
+      <p:sp>
+        <p:nvSpPr>
+          <p:cNvPr id="7" name="Rektangel 6">
+            <a:extLst>
+              <a:ext uri="{FF2B5EF4-FFF2-40B4-BE49-F238E27FC236}">
+                <a16:creationId xmlns:a16="http://schemas.microsoft.com/office/drawing/2014/main" id="{D1B83C13-4E7C-845A-1A8C-BCB6CE73AABA}"/>
+              </a:ext>
+            </a:extLst>
+          </p:cNvPr>
+          <p:cNvSpPr/>
+          <p:nvPr/>
+        </p:nvSpPr>
+        <p:spPr>
+          <a:xfrm>
+            <a:off x="145425" y="106610"/>
+            <a:ext cx="11910740" cy="6612242"/>
+          </a:xfrm>
+          <a:prstGeom prst="rect">
+            <a:avLst/>
+          </a:prstGeom>
+          <a:ln w="317500">
+            <a:solidFill>
+              <a:srgbClr val="344B38"/>
+            </a:solidFill>
+          </a:ln>
+        </p:spPr>
+        <p:style>
+          <a:lnRef idx="2">
+            <a:schemeClr val="accent3"/>
+          </a:lnRef>
+          <a:fillRef idx="1">
+            <a:schemeClr val="lt1"/>
+          </a:fillRef>
+          <a:effectRef idx="0">
+            <a:schemeClr val="accent3"/>
+          </a:effectRef>
+          <a:fontRef idx="minor">
+            <a:schemeClr val="dk1"/>
+          </a:fontRef>
+        </p:style>
+        <p:txBody>
+          <a:bodyPr rtlCol="0" anchor="ctr"/>
+          <a:lstStyle/>
+          <a:p>
+            <a:pPr algn="ctr"/>
+            <a:endParaRPr lang="es-ES"/>
+          </a:p>
+        </p:txBody>
+      </p:sp>
+      <p:sp>
+        <p:nvSpPr>
+          <p:cNvPr id="9" name="Tekstfelt 8">
+            <a:extLst>
+              <a:ext uri="{FF2B5EF4-FFF2-40B4-BE49-F238E27FC236}">
+                <a16:creationId xmlns:a16="http://schemas.microsoft.com/office/drawing/2014/main" id="{6AAA2DEB-E407-6129-0B97-744A2C7E3787}"/>
+              </a:ext>
+            </a:extLst>
+          </p:cNvPr>
+          <p:cNvSpPr txBox="1"/>
+          <p:nvPr/>
+        </p:nvSpPr>
+        <p:spPr>
+          <a:xfrm>
+            <a:off x="3992880" y="4321586"/>
+            <a:ext cx="4206240" cy="461665"/>
+          </a:xfrm>
+          <a:prstGeom prst="rect">
+            <a:avLst/>
+          </a:prstGeom>
+          <a:noFill/>
+        </p:spPr>
+        <p:txBody>
+          <a:bodyPr wrap="square" rtlCol="0">
+            <a:spAutoFit/>
+          </a:bodyPr>
+          <a:lstStyle/>
+          <a:p>
+            <a:r>
+              <a:rPr lang="da-DK" sz="2400" b="1" dirty="0">
+                <a:solidFill>
+                  <a:schemeClr val="tx1">
+                    <a:lumMod val="85000"/>
+                    <a:lumOff val="15000"/>
+                  </a:schemeClr>
+                </a:solidFill>
+              </a:rPr>
+              <a:t>Kort demo (hvis I ønsker det)</a:t>
+            </a:r>
+          </a:p>
+        </p:txBody>
+      </p:sp>
+      <p:pic>
+        <p:nvPicPr>
+          <p:cNvPr id="5" name="Billede 4">
+            <a:extLst>
+              <a:ext uri="{FF2B5EF4-FFF2-40B4-BE49-F238E27FC236}">
+                <a16:creationId xmlns:a16="http://schemas.microsoft.com/office/drawing/2014/main" id="{E35A7528-AC7D-C06B-98F8-F931CA9FEBB6}"/>
+              </a:ext>
+            </a:extLst>
+          </p:cNvPr>
+          <p:cNvPicPr>
+            <a:picLocks noChangeAspect="1"/>
+          </p:cNvPicPr>
+          <p:nvPr/>
+        </p:nvPicPr>
+        <p:blipFill>
+          <a:blip r:embed="rId2">
+            <a:extLst>
+              <a:ext uri="{28A0092B-C50C-407E-A947-70E740481C1C}">
+                <a14:useLocalDpi xmlns:a14="http://schemas.microsoft.com/office/drawing/2010/main" val="0"/>
+              </a:ext>
+            </a:extLst>
+          </a:blip>
+          <a:stretch>
+            <a:fillRect/>
+          </a:stretch>
+        </p:blipFill>
+        <p:spPr>
+          <a:xfrm>
+            <a:off x="3656614" y="260039"/>
+            <a:ext cx="4878772" cy="4878772"/>
+          </a:xfrm>
+          <a:prstGeom prst="rect">
+            <a:avLst/>
+          </a:prstGeom>
+        </p:spPr>
+      </p:pic>
+      <p:sp>
+        <p:nvSpPr>
+          <p:cNvPr id="11" name="Tekstfelt 10">
+            <a:extLst>
+              <a:ext uri="{FF2B5EF4-FFF2-40B4-BE49-F238E27FC236}">
+                <a16:creationId xmlns:a16="http://schemas.microsoft.com/office/drawing/2014/main" id="{7F357510-2C14-236A-8AD9-A48341673D9C}"/>
+              </a:ext>
+            </a:extLst>
+          </p:cNvPr>
+          <p:cNvSpPr txBox="1"/>
+          <p:nvPr/>
+        </p:nvSpPr>
+        <p:spPr>
+          <a:xfrm>
+            <a:off x="3896627" y="4907978"/>
+            <a:ext cx="4206240" cy="461665"/>
+          </a:xfrm>
+          <a:prstGeom prst="rect">
+            <a:avLst/>
+          </a:prstGeom>
+          <a:noFill/>
+        </p:spPr>
+        <p:txBody>
+          <a:bodyPr wrap="square" rtlCol="0">
+            <a:spAutoFit/>
+          </a:bodyPr>
+          <a:lstStyle/>
+          <a:p>
+            <a:pPr algn="ctr"/>
+            <a:r>
+              <a:rPr lang="da-DK" sz="2400" b="1" dirty="0">
+                <a:solidFill>
+                  <a:schemeClr val="tx1">
+                    <a:lumMod val="85000"/>
+                    <a:lumOff val="15000"/>
+                  </a:schemeClr>
+                </a:solidFill>
+              </a:rPr>
+              <a:t>Tak for denne gang!</a:t>
+            </a:r>
+          </a:p>
+        </p:txBody>
+      </p:sp>
+    </p:spTree>
+    <p:extLst>
+      <p:ext uri="{BB962C8B-B14F-4D97-AF65-F5344CB8AC3E}">
+        <p14:creationId xmlns:p14="http://schemas.microsoft.com/office/powerpoint/2010/main" val="1731330183"/>
+      </p:ext>
+    </p:extLst>
+  </p:cSld>
+  <p:clrMapOvr>
+    <a:masterClrMapping/>
+  </p:clrMapOvr>
+</p:sld>
+</file>
+
 <file path=ppt/slides/slide2.xml><?xml version="1.0" encoding="utf-8"?>
 <p:sld xmlns:a="http://schemas.openxmlformats.org/drawingml/2006/main" xmlns:r="http://schemas.openxmlformats.org/officeDocument/2006/relationships" xmlns:p="http://schemas.openxmlformats.org/presentationml/2006/main">
   <p:cSld>
@@ -5542,6 +5754,218 @@
         <p:cNvPr id="1" name="">
           <a:extLst>
             <a:ext uri="{FF2B5EF4-FFF2-40B4-BE49-F238E27FC236}">
+              <a16:creationId xmlns:a16="http://schemas.microsoft.com/office/drawing/2014/main" id="{247CAD9B-C58F-D99C-9896-B5284F227A92}"/>
+            </a:ext>
+          </a:extLst>
+        </p:cNvPr>
+        <p:cNvGrpSpPr/>
+        <p:nvPr/>
+      </p:nvGrpSpPr>
+      <p:grpSpPr>
+        <a:xfrm>
+          <a:off x="0" y="0"/>
+          <a:ext cx="0" cy="0"/>
+          <a:chOff x="0" y="0"/>
+          <a:chExt cx="0" cy="0"/>
+        </a:xfrm>
+      </p:grpSpPr>
+      <p:sp>
+        <p:nvSpPr>
+          <p:cNvPr id="7" name="Rektangel 6">
+            <a:extLst>
+              <a:ext uri="{FF2B5EF4-FFF2-40B4-BE49-F238E27FC236}">
+                <a16:creationId xmlns:a16="http://schemas.microsoft.com/office/drawing/2014/main" id="{CD5DF329-E31D-F044-6CC6-E0FFC5D8ACE1}"/>
+              </a:ext>
+            </a:extLst>
+          </p:cNvPr>
+          <p:cNvSpPr/>
+          <p:nvPr/>
+        </p:nvSpPr>
+        <p:spPr>
+          <a:xfrm>
+            <a:off x="145425" y="106610"/>
+            <a:ext cx="11910740" cy="6612242"/>
+          </a:xfrm>
+          <a:prstGeom prst="rect">
+            <a:avLst/>
+          </a:prstGeom>
+          <a:ln w="317500">
+            <a:solidFill>
+              <a:srgbClr val="344B38"/>
+            </a:solidFill>
+          </a:ln>
+        </p:spPr>
+        <p:style>
+          <a:lnRef idx="2">
+            <a:schemeClr val="accent3"/>
+          </a:lnRef>
+          <a:fillRef idx="1">
+            <a:schemeClr val="lt1"/>
+          </a:fillRef>
+          <a:effectRef idx="0">
+            <a:schemeClr val="accent3"/>
+          </a:effectRef>
+          <a:fontRef idx="minor">
+            <a:schemeClr val="dk1"/>
+          </a:fontRef>
+        </p:style>
+        <p:txBody>
+          <a:bodyPr rtlCol="0" anchor="ctr"/>
+          <a:lstStyle/>
+          <a:p>
+            <a:pPr algn="ctr"/>
+            <a:endParaRPr lang="es-ES"/>
+          </a:p>
+        </p:txBody>
+      </p:sp>
+      <p:sp>
+        <p:nvSpPr>
+          <p:cNvPr id="9" name="Tekstfelt 8">
+            <a:extLst>
+              <a:ext uri="{FF2B5EF4-FFF2-40B4-BE49-F238E27FC236}">
+                <a16:creationId xmlns:a16="http://schemas.microsoft.com/office/drawing/2014/main" id="{C8160F7D-158E-022F-AAB2-6DFE51006B83}"/>
+              </a:ext>
+            </a:extLst>
+          </p:cNvPr>
+          <p:cNvSpPr txBox="1"/>
+          <p:nvPr/>
+        </p:nvSpPr>
+        <p:spPr>
+          <a:xfrm>
+            <a:off x="664143" y="651994"/>
+            <a:ext cx="5774634" cy="461665"/>
+          </a:xfrm>
+          <a:prstGeom prst="rect">
+            <a:avLst/>
+          </a:prstGeom>
+          <a:noFill/>
+        </p:spPr>
+        <p:txBody>
+          <a:bodyPr wrap="square" rtlCol="0">
+            <a:spAutoFit/>
+          </a:bodyPr>
+          <a:lstStyle/>
+          <a:p>
+            <a:r>
+              <a:rPr lang="da-DK" sz="2400" b="1" dirty="0">
+                <a:solidFill>
+                  <a:schemeClr val="tx1">
+                    <a:lumMod val="85000"/>
+                    <a:lumOff val="15000"/>
+                  </a:schemeClr>
+                </a:solidFill>
+              </a:rPr>
+              <a:t>Systemskitse (kort gennemgang)</a:t>
+            </a:r>
+            <a:endParaRPr lang="es-ES" sz="2400" b="1" dirty="0">
+              <a:solidFill>
+                <a:schemeClr val="tx1">
+                  <a:lumMod val="85000"/>
+                  <a:lumOff val="15000"/>
+                </a:schemeClr>
+              </a:solidFill>
+            </a:endParaRPr>
+          </a:p>
+        </p:txBody>
+      </p:sp>
+      <p:cxnSp>
+        <p:nvCxnSpPr>
+          <p:cNvPr id="12" name="Lige forbindelse 11">
+            <a:extLst>
+              <a:ext uri="{FF2B5EF4-FFF2-40B4-BE49-F238E27FC236}">
+                <a16:creationId xmlns:a16="http://schemas.microsoft.com/office/drawing/2014/main" id="{AB005B2B-D63B-877C-CB0E-1BD8CF2BF53A}"/>
+              </a:ext>
+            </a:extLst>
+          </p:cNvPr>
+          <p:cNvCxnSpPr>
+            <a:cxnSpLocks/>
+          </p:cNvCxnSpPr>
+          <p:nvPr/>
+        </p:nvCxnSpPr>
+        <p:spPr>
+          <a:xfrm>
+            <a:off x="766946" y="1238183"/>
+            <a:ext cx="2928754" cy="0"/>
+          </a:xfrm>
+          <a:prstGeom prst="line">
+            <a:avLst/>
+          </a:prstGeom>
+          <a:ln w="28575" cap="flat" cmpd="sng" algn="ctr">
+            <a:solidFill>
+              <a:srgbClr val="344B38"/>
+            </a:solidFill>
+            <a:prstDash val="dash"/>
+            <a:round/>
+            <a:headEnd type="none" w="med" len="med"/>
+            <a:tailEnd type="none" w="med" len="med"/>
+          </a:ln>
+        </p:spPr>
+        <p:style>
+          <a:lnRef idx="0">
+            <a:scrgbClr r="0" g="0" b="0"/>
+          </a:lnRef>
+          <a:fillRef idx="0">
+            <a:scrgbClr r="0" g="0" b="0"/>
+          </a:fillRef>
+          <a:effectRef idx="0">
+            <a:scrgbClr r="0" g="0" b="0"/>
+          </a:effectRef>
+          <a:fontRef idx="minor">
+            <a:schemeClr val="tx1"/>
+          </a:fontRef>
+        </p:style>
+      </p:cxnSp>
+      <p:pic>
+        <p:nvPicPr>
+          <p:cNvPr id="4" name="Billede 3">
+            <a:extLst>
+              <a:ext uri="{FF2B5EF4-FFF2-40B4-BE49-F238E27FC236}">
+                <a16:creationId xmlns:a16="http://schemas.microsoft.com/office/drawing/2014/main" id="{0FCF51D6-0B84-61D4-DD27-3E2AB92388FC}"/>
+              </a:ext>
+            </a:extLst>
+          </p:cNvPr>
+          <p:cNvPicPr>
+            <a:picLocks noChangeAspect="1"/>
+          </p:cNvPicPr>
+          <p:nvPr/>
+        </p:nvPicPr>
+        <p:blipFill>
+          <a:blip r:embed="rId2"/>
+          <a:stretch>
+            <a:fillRect/>
+          </a:stretch>
+        </p:blipFill>
+        <p:spPr>
+          <a:xfrm>
+            <a:off x="2140212" y="1471739"/>
+            <a:ext cx="7408049" cy="5039636"/>
+          </a:xfrm>
+          <a:prstGeom prst="rect">
+            <a:avLst/>
+          </a:prstGeom>
+        </p:spPr>
+      </p:pic>
+    </p:spTree>
+    <p:extLst>
+      <p:ext uri="{BB962C8B-B14F-4D97-AF65-F5344CB8AC3E}">
+        <p14:creationId xmlns:p14="http://schemas.microsoft.com/office/powerpoint/2010/main" val="196961976"/>
+      </p:ext>
+    </p:extLst>
+  </p:cSld>
+  <p:clrMapOvr>
+    <a:masterClrMapping/>
+  </p:clrMapOvr>
+</p:sld>
+</file>
+
+<file path=ppt/slides/slide7.xml><?xml version="1.0" encoding="utf-8"?>
+<p:sld xmlns:a="http://schemas.openxmlformats.org/drawingml/2006/main" xmlns:r="http://schemas.openxmlformats.org/officeDocument/2006/relationships" xmlns:p="http://schemas.openxmlformats.org/presentationml/2006/main">
+  <p:cSld>
+    <p:spTree>
+      <p:nvGrpSpPr>
+        <p:cNvPr id="1" name="">
+          <a:extLst>
+            <a:ext uri="{FF2B5EF4-FFF2-40B4-BE49-F238E27FC236}">
               <a16:creationId xmlns:a16="http://schemas.microsoft.com/office/drawing/2014/main" id="{C4AD6723-C1ED-8836-B022-6233550CD8D5}"/>
             </a:ext>
           </a:extLst>
@@ -6223,7 +6647,7 @@
 </p:sld>
 </file>
 
-<file path=ppt/slides/slide7.xml><?xml version="1.0" encoding="utf-8"?>
+<file path=ppt/slides/slide8.xml><?xml version="1.0" encoding="utf-8"?>
 <p:sld xmlns:a="http://schemas.openxmlformats.org/drawingml/2006/main" xmlns:r="http://schemas.openxmlformats.org/officeDocument/2006/relationships" xmlns:p="http://schemas.openxmlformats.org/presentationml/2006/main">
   <p:cSld>
     <p:spTree>
@@ -6794,7 +7218,7 @@
         <p:spPr>
           <a:xfrm>
             <a:off x="6360153" y="2079902"/>
-            <a:ext cx="4995513" cy="3139321"/>
+            <a:ext cx="4995513" cy="2862322"/>
           </a:xfrm>
           <a:prstGeom prst="rect">
             <a:avLst/>
@@ -6854,7 +7278,7 @@
                   </a:schemeClr>
                 </a:solidFill>
               </a:rPr>
-              <a:t>Privatliv (knæ, genoptræning &amp; livet)</a:t>
+              <a:t>Privatliv</a:t>
             </a:r>
           </a:p>
           <a:p>
@@ -6956,22 +7380,8 @@
                   </a:schemeClr>
                 </a:solidFill>
               </a:rPr>
-              <a:t>Klassen på 4. Semester er direkte ubehagelig</a:t>
-            </a:r>
-          </a:p>
-          <a:p>
-            <a:pPr marL="285750" indent="-285750">
-              <a:buFont typeface="Arial" panose="020B0604020202020204" pitchFamily="34" charset="0"/>
-              <a:buChar char="•"/>
-            </a:pPr>
-            <a:endParaRPr lang="da-DK" dirty="0">
-              <a:solidFill>
-                <a:schemeClr val="tx1">
-                  <a:lumMod val="85000"/>
-                  <a:lumOff val="15000"/>
-                </a:schemeClr>
-              </a:solidFill>
-            </a:endParaRPr>
+              <a:t>Klassen på 4. Semester</a:t>
+            </a:r>
           </a:p>
         </p:txBody>
       </p:sp>
@@ -6997,8 +7407,8 @@
         </p:blipFill>
         <p:spPr>
           <a:xfrm>
-            <a:off x="1230971" y="4255087"/>
-            <a:ext cx="3778455" cy="1930379"/>
+            <a:off x="1270534" y="3979293"/>
+            <a:ext cx="4358489" cy="2226713"/>
           </a:xfrm>
           <a:prstGeom prst="rect">
             <a:avLst/>
@@ -7018,7 +7428,7 @@
 </p:sld>
 </file>
 
-<file path=ppt/slides/slide8.xml><?xml version="1.0" encoding="utf-8"?>
+<file path=ppt/slides/slide9.xml><?xml version="1.0" encoding="utf-8"?>
 <p:sld xmlns:a="http://schemas.openxmlformats.org/drawingml/2006/main" xmlns:r="http://schemas.openxmlformats.org/officeDocument/2006/relationships" xmlns:p="http://schemas.openxmlformats.org/presentationml/2006/main">
   <p:cSld>
     <p:spTree>
@@ -7787,212 +8197,6 @@
     <p:extLst>
       <p:ext uri="{BB962C8B-B14F-4D97-AF65-F5344CB8AC3E}">
         <p14:creationId xmlns:p14="http://schemas.microsoft.com/office/powerpoint/2010/main" val="18316513"/>
-      </p:ext>
-    </p:extLst>
-  </p:cSld>
-  <p:clrMapOvr>
-    <a:masterClrMapping/>
-  </p:clrMapOvr>
-</p:sld>
-</file>
-
-<file path=ppt/slides/slide9.xml><?xml version="1.0" encoding="utf-8"?>
-<p:sld xmlns:a="http://schemas.openxmlformats.org/drawingml/2006/main" xmlns:r="http://schemas.openxmlformats.org/officeDocument/2006/relationships" xmlns:p="http://schemas.openxmlformats.org/presentationml/2006/main">
-  <p:cSld>
-    <p:spTree>
-      <p:nvGrpSpPr>
-        <p:cNvPr id="1" name="">
-          <a:extLst>
-            <a:ext uri="{FF2B5EF4-FFF2-40B4-BE49-F238E27FC236}">
-              <a16:creationId xmlns:a16="http://schemas.microsoft.com/office/drawing/2014/main" id="{2A5F38E9-E043-1AC8-7389-9529CCD0C61A}"/>
-            </a:ext>
-          </a:extLst>
-        </p:cNvPr>
-        <p:cNvGrpSpPr/>
-        <p:nvPr/>
-      </p:nvGrpSpPr>
-      <p:grpSpPr>
-        <a:xfrm>
-          <a:off x="0" y="0"/>
-          <a:ext cx="0" cy="0"/>
-          <a:chOff x="0" y="0"/>
-          <a:chExt cx="0" cy="0"/>
-        </a:xfrm>
-      </p:grpSpPr>
-      <p:sp>
-        <p:nvSpPr>
-          <p:cNvPr id="7" name="Rektangel 6">
-            <a:extLst>
-              <a:ext uri="{FF2B5EF4-FFF2-40B4-BE49-F238E27FC236}">
-                <a16:creationId xmlns:a16="http://schemas.microsoft.com/office/drawing/2014/main" id="{D1B83C13-4E7C-845A-1A8C-BCB6CE73AABA}"/>
-              </a:ext>
-            </a:extLst>
-          </p:cNvPr>
-          <p:cNvSpPr/>
-          <p:nvPr/>
-        </p:nvSpPr>
-        <p:spPr>
-          <a:xfrm>
-            <a:off x="145425" y="106610"/>
-            <a:ext cx="11910740" cy="6612242"/>
-          </a:xfrm>
-          <a:prstGeom prst="rect">
-            <a:avLst/>
-          </a:prstGeom>
-          <a:ln w="317500">
-            <a:solidFill>
-              <a:srgbClr val="344B38"/>
-            </a:solidFill>
-          </a:ln>
-        </p:spPr>
-        <p:style>
-          <a:lnRef idx="2">
-            <a:schemeClr val="accent3"/>
-          </a:lnRef>
-          <a:fillRef idx="1">
-            <a:schemeClr val="lt1"/>
-          </a:fillRef>
-          <a:effectRef idx="0">
-            <a:schemeClr val="accent3"/>
-          </a:effectRef>
-          <a:fontRef idx="minor">
-            <a:schemeClr val="dk1"/>
-          </a:fontRef>
-        </p:style>
-        <p:txBody>
-          <a:bodyPr rtlCol="0" anchor="ctr"/>
-          <a:lstStyle/>
-          <a:p>
-            <a:pPr algn="ctr"/>
-            <a:endParaRPr lang="es-ES"/>
-          </a:p>
-        </p:txBody>
-      </p:sp>
-      <p:sp>
-        <p:nvSpPr>
-          <p:cNvPr id="9" name="Tekstfelt 8">
-            <a:extLst>
-              <a:ext uri="{FF2B5EF4-FFF2-40B4-BE49-F238E27FC236}">
-                <a16:creationId xmlns:a16="http://schemas.microsoft.com/office/drawing/2014/main" id="{6AAA2DEB-E407-6129-0B97-744A2C7E3787}"/>
-              </a:ext>
-            </a:extLst>
-          </p:cNvPr>
-          <p:cNvSpPr txBox="1"/>
-          <p:nvPr/>
-        </p:nvSpPr>
-        <p:spPr>
-          <a:xfrm>
-            <a:off x="3992880" y="4321586"/>
-            <a:ext cx="4206240" cy="461665"/>
-          </a:xfrm>
-          <a:prstGeom prst="rect">
-            <a:avLst/>
-          </a:prstGeom>
-          <a:noFill/>
-        </p:spPr>
-        <p:txBody>
-          <a:bodyPr wrap="square" rtlCol="0">
-            <a:spAutoFit/>
-          </a:bodyPr>
-          <a:lstStyle/>
-          <a:p>
-            <a:r>
-              <a:rPr lang="da-DK" sz="2400" b="1" dirty="0">
-                <a:solidFill>
-                  <a:schemeClr val="tx1">
-                    <a:lumMod val="85000"/>
-                    <a:lumOff val="15000"/>
-                  </a:schemeClr>
-                </a:solidFill>
-              </a:rPr>
-              <a:t>Kort demo (hvis I ønsker det)</a:t>
-            </a:r>
-          </a:p>
-        </p:txBody>
-      </p:sp>
-      <p:pic>
-        <p:nvPicPr>
-          <p:cNvPr id="5" name="Billede 4">
-            <a:extLst>
-              <a:ext uri="{FF2B5EF4-FFF2-40B4-BE49-F238E27FC236}">
-                <a16:creationId xmlns:a16="http://schemas.microsoft.com/office/drawing/2014/main" id="{E35A7528-AC7D-C06B-98F8-F931CA9FEBB6}"/>
-              </a:ext>
-            </a:extLst>
-          </p:cNvPr>
-          <p:cNvPicPr>
-            <a:picLocks noChangeAspect="1"/>
-          </p:cNvPicPr>
-          <p:nvPr/>
-        </p:nvPicPr>
-        <p:blipFill>
-          <a:blip r:embed="rId2">
-            <a:extLst>
-              <a:ext uri="{28A0092B-C50C-407E-A947-70E740481C1C}">
-                <a14:useLocalDpi xmlns:a14="http://schemas.microsoft.com/office/drawing/2010/main" val="0"/>
-              </a:ext>
-            </a:extLst>
-          </a:blip>
-          <a:stretch>
-            <a:fillRect/>
-          </a:stretch>
-        </p:blipFill>
-        <p:spPr>
-          <a:xfrm>
-            <a:off x="3656614" y="260039"/>
-            <a:ext cx="4878772" cy="4878772"/>
-          </a:xfrm>
-          <a:prstGeom prst="rect">
-            <a:avLst/>
-          </a:prstGeom>
-        </p:spPr>
-      </p:pic>
-      <p:sp>
-        <p:nvSpPr>
-          <p:cNvPr id="11" name="Tekstfelt 10">
-            <a:extLst>
-              <a:ext uri="{FF2B5EF4-FFF2-40B4-BE49-F238E27FC236}">
-                <a16:creationId xmlns:a16="http://schemas.microsoft.com/office/drawing/2014/main" id="{7F357510-2C14-236A-8AD9-A48341673D9C}"/>
-              </a:ext>
-            </a:extLst>
-          </p:cNvPr>
-          <p:cNvSpPr txBox="1"/>
-          <p:nvPr/>
-        </p:nvSpPr>
-        <p:spPr>
-          <a:xfrm>
-            <a:off x="3896627" y="4907978"/>
-            <a:ext cx="4206240" cy="461665"/>
-          </a:xfrm>
-          <a:prstGeom prst="rect">
-            <a:avLst/>
-          </a:prstGeom>
-          <a:noFill/>
-        </p:spPr>
-        <p:txBody>
-          <a:bodyPr wrap="square" rtlCol="0">
-            <a:spAutoFit/>
-          </a:bodyPr>
-          <a:lstStyle/>
-          <a:p>
-            <a:pPr algn="ctr"/>
-            <a:r>
-              <a:rPr lang="da-DK" sz="2400" b="1" dirty="0">
-                <a:solidFill>
-                  <a:schemeClr val="tx1">
-                    <a:lumMod val="85000"/>
-                    <a:lumOff val="15000"/>
-                  </a:schemeClr>
-                </a:solidFill>
-              </a:rPr>
-              <a:t>Tak for denne gang!</a:t>
-            </a:r>
-          </a:p>
-        </p:txBody>
-      </p:sp>
-    </p:spTree>
-    <p:extLst>
-      <p:ext uri="{BB962C8B-B14F-4D97-AF65-F5344CB8AC3E}">
-        <p14:creationId xmlns:p14="http://schemas.microsoft.com/office/powerpoint/2010/main" val="1731330183"/>
       </p:ext>
     </p:extLst>
   </p:cSld>

--- a/exam/exam.pptx
+++ b/exam/exam.pptx
@@ -10,11 +10,13 @@
     <p:sldId id="258" r:id="rId4"/>
     <p:sldId id="259" r:id="rId5"/>
     <p:sldId id="260" r:id="rId6"/>
-    <p:sldId id="265" r:id="rId7"/>
-    <p:sldId id="261" r:id="rId8"/>
-    <p:sldId id="262" r:id="rId9"/>
-    <p:sldId id="263" r:id="rId10"/>
-    <p:sldId id="264" r:id="rId11"/>
+    <p:sldId id="266" r:id="rId7"/>
+    <p:sldId id="267" r:id="rId8"/>
+    <p:sldId id="265" r:id="rId9"/>
+    <p:sldId id="261" r:id="rId10"/>
+    <p:sldId id="262" r:id="rId11"/>
+    <p:sldId id="263" r:id="rId12"/>
+    <p:sldId id="264" r:id="rId13"/>
   </p:sldIdLst>
   <p:sldSz cx="12192000" cy="6858000"/>
   <p:notesSz cx="6858000" cy="9144000"/>
@@ -270,7 +272,7 @@
           <a:p>
             <a:fld id="{BE7E296C-ABD0-495D-8AB8-4FC63D775AEA}" type="datetimeFigureOut">
               <a:rPr lang="es-ES" smtClean="0"/>
-              <a:t>16/10/2026</a:t>
+              <a:t>18/10/2026</a:t>
             </a:fld>
             <a:endParaRPr lang="es-ES"/>
           </a:p>
@@ -470,7 +472,7 @@
           <a:p>
             <a:fld id="{BE7E296C-ABD0-495D-8AB8-4FC63D775AEA}" type="datetimeFigureOut">
               <a:rPr lang="es-ES" smtClean="0"/>
-              <a:t>16/10/2026</a:t>
+              <a:t>18/10/2026</a:t>
             </a:fld>
             <a:endParaRPr lang="es-ES"/>
           </a:p>
@@ -680,7 +682,7 @@
           <a:p>
             <a:fld id="{BE7E296C-ABD0-495D-8AB8-4FC63D775AEA}" type="datetimeFigureOut">
               <a:rPr lang="es-ES" smtClean="0"/>
-              <a:t>16/10/2026</a:t>
+              <a:t>18/10/2026</a:t>
             </a:fld>
             <a:endParaRPr lang="es-ES"/>
           </a:p>
@@ -880,7 +882,7 @@
           <a:p>
             <a:fld id="{BE7E296C-ABD0-495D-8AB8-4FC63D775AEA}" type="datetimeFigureOut">
               <a:rPr lang="es-ES" smtClean="0"/>
-              <a:t>16/10/2026</a:t>
+              <a:t>18/10/2026</a:t>
             </a:fld>
             <a:endParaRPr lang="es-ES"/>
           </a:p>
@@ -1156,7 +1158,7 @@
           <a:p>
             <a:fld id="{BE7E296C-ABD0-495D-8AB8-4FC63D775AEA}" type="datetimeFigureOut">
               <a:rPr lang="es-ES" smtClean="0"/>
-              <a:t>16/10/2026</a:t>
+              <a:t>18/10/2026</a:t>
             </a:fld>
             <a:endParaRPr lang="es-ES"/>
           </a:p>
@@ -1424,7 +1426,7 @@
           <a:p>
             <a:fld id="{BE7E296C-ABD0-495D-8AB8-4FC63D775AEA}" type="datetimeFigureOut">
               <a:rPr lang="es-ES" smtClean="0"/>
-              <a:t>16/10/2026</a:t>
+              <a:t>18/10/2026</a:t>
             </a:fld>
             <a:endParaRPr lang="es-ES"/>
           </a:p>
@@ -1839,7 +1841,7 @@
           <a:p>
             <a:fld id="{BE7E296C-ABD0-495D-8AB8-4FC63D775AEA}" type="datetimeFigureOut">
               <a:rPr lang="es-ES" smtClean="0"/>
-              <a:t>16/10/2026</a:t>
+              <a:t>18/10/2026</a:t>
             </a:fld>
             <a:endParaRPr lang="es-ES"/>
           </a:p>
@@ -1981,7 +1983,7 @@
           <a:p>
             <a:fld id="{BE7E296C-ABD0-495D-8AB8-4FC63D775AEA}" type="datetimeFigureOut">
               <a:rPr lang="es-ES" smtClean="0"/>
-              <a:t>16/10/2026</a:t>
+              <a:t>18/10/2026</a:t>
             </a:fld>
             <a:endParaRPr lang="es-ES"/>
           </a:p>
@@ -2094,7 +2096,7 @@
           <a:p>
             <a:fld id="{BE7E296C-ABD0-495D-8AB8-4FC63D775AEA}" type="datetimeFigureOut">
               <a:rPr lang="es-ES" smtClean="0"/>
-              <a:t>16/10/2026</a:t>
+              <a:t>18/10/2026</a:t>
             </a:fld>
             <a:endParaRPr lang="es-ES"/>
           </a:p>
@@ -2407,7 +2409,7 @@
           <a:p>
             <a:fld id="{BE7E296C-ABD0-495D-8AB8-4FC63D775AEA}" type="datetimeFigureOut">
               <a:rPr lang="es-ES" smtClean="0"/>
-              <a:t>16/10/2026</a:t>
+              <a:t>18/10/2026</a:t>
             </a:fld>
             <a:endParaRPr lang="es-ES"/>
           </a:p>
@@ -2696,7 +2698,7 @@
           <a:p>
             <a:fld id="{BE7E296C-ABD0-495D-8AB8-4FC63D775AEA}" type="datetimeFigureOut">
               <a:rPr lang="es-ES" smtClean="0"/>
-              <a:t>16/10/2026</a:t>
+              <a:t>18/10/2026</a:t>
             </a:fld>
             <a:endParaRPr lang="es-ES"/>
           </a:p>
@@ -2939,7 +2941,7 @@
           <a:p>
             <a:fld id="{BE7E296C-ABD0-495D-8AB8-4FC63D775AEA}" type="datetimeFigureOut">
               <a:rPr lang="es-ES" smtClean="0"/>
-              <a:t>16/10/2026</a:t>
+              <a:t>18/10/2026</a:t>
             </a:fld>
             <a:endParaRPr lang="es-ES"/>
           </a:p>
@@ -3539,6 +3541,1565 @@
         <p:cNvPr id="1" name="">
           <a:extLst>
             <a:ext uri="{FF2B5EF4-FFF2-40B4-BE49-F238E27FC236}">
+              <a16:creationId xmlns:a16="http://schemas.microsoft.com/office/drawing/2014/main" id="{D6F48729-A369-0986-2CCE-FF0F3720A7BF}"/>
+            </a:ext>
+          </a:extLst>
+        </p:cNvPr>
+        <p:cNvGrpSpPr/>
+        <p:nvPr/>
+      </p:nvGrpSpPr>
+      <p:grpSpPr>
+        <a:xfrm>
+          <a:off x="0" y="0"/>
+          <a:ext cx="0" cy="0"/>
+          <a:chOff x="0" y="0"/>
+          <a:chExt cx="0" cy="0"/>
+        </a:xfrm>
+      </p:grpSpPr>
+      <p:sp>
+        <p:nvSpPr>
+          <p:cNvPr id="7" name="Rektangel 6">
+            <a:extLst>
+              <a:ext uri="{FF2B5EF4-FFF2-40B4-BE49-F238E27FC236}">
+                <a16:creationId xmlns:a16="http://schemas.microsoft.com/office/drawing/2014/main" id="{AE0E5A89-B35F-9B4B-DB90-743D659721C9}"/>
+              </a:ext>
+            </a:extLst>
+          </p:cNvPr>
+          <p:cNvSpPr/>
+          <p:nvPr/>
+        </p:nvSpPr>
+        <p:spPr>
+          <a:xfrm>
+            <a:off x="145425" y="106610"/>
+            <a:ext cx="11910740" cy="6612242"/>
+          </a:xfrm>
+          <a:prstGeom prst="rect">
+            <a:avLst/>
+          </a:prstGeom>
+          <a:ln w="317500">
+            <a:solidFill>
+              <a:srgbClr val="344B38"/>
+            </a:solidFill>
+          </a:ln>
+        </p:spPr>
+        <p:style>
+          <a:lnRef idx="2">
+            <a:schemeClr val="accent3"/>
+          </a:lnRef>
+          <a:fillRef idx="1">
+            <a:schemeClr val="lt1"/>
+          </a:fillRef>
+          <a:effectRef idx="0">
+            <a:schemeClr val="accent3"/>
+          </a:effectRef>
+          <a:fontRef idx="minor">
+            <a:schemeClr val="dk1"/>
+          </a:fontRef>
+        </p:style>
+        <p:txBody>
+          <a:bodyPr rtlCol="0" anchor="ctr"/>
+          <a:lstStyle/>
+          <a:p>
+            <a:pPr algn="ctr"/>
+            <a:endParaRPr lang="es-ES"/>
+          </a:p>
+        </p:txBody>
+      </p:sp>
+      <p:sp>
+        <p:nvSpPr>
+          <p:cNvPr id="9" name="Tekstfelt 8">
+            <a:extLst>
+              <a:ext uri="{FF2B5EF4-FFF2-40B4-BE49-F238E27FC236}">
+                <a16:creationId xmlns:a16="http://schemas.microsoft.com/office/drawing/2014/main" id="{912FF84D-00F5-98DE-6DB9-7F55ED161065}"/>
+              </a:ext>
+            </a:extLst>
+          </p:cNvPr>
+          <p:cNvSpPr txBox="1"/>
+          <p:nvPr/>
+        </p:nvSpPr>
+        <p:spPr>
+          <a:xfrm>
+            <a:off x="664143" y="651994"/>
+            <a:ext cx="5774634" cy="461665"/>
+          </a:xfrm>
+          <a:prstGeom prst="rect">
+            <a:avLst/>
+          </a:prstGeom>
+          <a:noFill/>
+        </p:spPr>
+        <p:txBody>
+          <a:bodyPr wrap="square" rtlCol="0">
+            <a:spAutoFit/>
+          </a:bodyPr>
+          <a:lstStyle/>
+          <a:p>
+            <a:r>
+              <a:rPr lang="da-DK" sz="2400" b="1" dirty="0">
+                <a:solidFill>
+                  <a:schemeClr val="tx1">
+                    <a:lumMod val="85000"/>
+                    <a:lumOff val="15000"/>
+                  </a:schemeClr>
+                </a:solidFill>
+              </a:rPr>
+              <a:t>Undervisning, læring &amp; evaluering</a:t>
+            </a:r>
+            <a:endParaRPr lang="es-ES" sz="2400" b="1" dirty="0">
+              <a:solidFill>
+                <a:schemeClr val="tx1">
+                  <a:lumMod val="85000"/>
+                  <a:lumOff val="15000"/>
+                </a:schemeClr>
+              </a:solidFill>
+            </a:endParaRPr>
+          </a:p>
+        </p:txBody>
+      </p:sp>
+      <p:cxnSp>
+        <p:nvCxnSpPr>
+          <p:cNvPr id="12" name="Lige forbindelse 11">
+            <a:extLst>
+              <a:ext uri="{FF2B5EF4-FFF2-40B4-BE49-F238E27FC236}">
+                <a16:creationId xmlns:a16="http://schemas.microsoft.com/office/drawing/2014/main" id="{64A51F5A-C057-7509-1698-C20815A584BF}"/>
+              </a:ext>
+            </a:extLst>
+          </p:cNvPr>
+          <p:cNvCxnSpPr>
+            <a:cxnSpLocks/>
+          </p:cNvCxnSpPr>
+          <p:nvPr/>
+        </p:nvCxnSpPr>
+        <p:spPr>
+          <a:xfrm>
+            <a:off x="766946" y="1238183"/>
+            <a:ext cx="2928754" cy="0"/>
+          </a:xfrm>
+          <a:prstGeom prst="line">
+            <a:avLst/>
+          </a:prstGeom>
+          <a:ln w="28575" cap="flat" cmpd="sng" algn="ctr">
+            <a:solidFill>
+              <a:srgbClr val="344B38"/>
+            </a:solidFill>
+            <a:prstDash val="dash"/>
+            <a:round/>
+            <a:headEnd type="none" w="med" len="med"/>
+            <a:tailEnd type="none" w="med" len="med"/>
+          </a:ln>
+        </p:spPr>
+        <p:style>
+          <a:lnRef idx="0">
+            <a:scrgbClr r="0" g="0" b="0"/>
+          </a:lnRef>
+          <a:fillRef idx="0">
+            <a:scrgbClr r="0" g="0" b="0"/>
+          </a:fillRef>
+          <a:effectRef idx="0">
+            <a:scrgbClr r="0" g="0" b="0"/>
+          </a:effectRef>
+          <a:fontRef idx="minor">
+            <a:schemeClr val="tx1"/>
+          </a:fontRef>
+        </p:style>
+      </p:cxnSp>
+      <p:sp>
+        <p:nvSpPr>
+          <p:cNvPr id="6" name="Tekstfelt 5">
+            <a:extLst>
+              <a:ext uri="{FF2B5EF4-FFF2-40B4-BE49-F238E27FC236}">
+                <a16:creationId xmlns:a16="http://schemas.microsoft.com/office/drawing/2014/main" id="{F749F099-23BD-7456-58C8-A9B578743DDB}"/>
+              </a:ext>
+            </a:extLst>
+          </p:cNvPr>
+          <p:cNvSpPr txBox="1"/>
+          <p:nvPr/>
+        </p:nvSpPr>
+        <p:spPr>
+          <a:xfrm>
+            <a:off x="664143" y="1659043"/>
+            <a:ext cx="1212783" cy="1754326"/>
+          </a:xfrm>
+          <a:prstGeom prst="rect">
+            <a:avLst/>
+          </a:prstGeom>
+          <a:noFill/>
+        </p:spPr>
+        <p:txBody>
+          <a:bodyPr wrap="square" rtlCol="0">
+            <a:spAutoFit/>
+          </a:bodyPr>
+          <a:lstStyle/>
+          <a:p>
+            <a:r>
+              <a:rPr lang="da-DK" b="1" dirty="0">
+                <a:solidFill>
+                  <a:schemeClr val="tx1">
+                    <a:lumMod val="85000"/>
+                    <a:lumOff val="15000"/>
+                  </a:schemeClr>
+                </a:solidFill>
+              </a:rPr>
+              <a:t>Godt</a:t>
+            </a:r>
+          </a:p>
+          <a:p>
+            <a:endParaRPr lang="da-DK" dirty="0">
+              <a:solidFill>
+                <a:schemeClr val="tx1">
+                  <a:lumMod val="85000"/>
+                  <a:lumOff val="15000"/>
+                </a:schemeClr>
+              </a:solidFill>
+            </a:endParaRPr>
+          </a:p>
+          <a:p>
+            <a:endParaRPr lang="da-DK" dirty="0">
+              <a:solidFill>
+                <a:schemeClr val="tx1">
+                  <a:lumMod val="85000"/>
+                  <a:lumOff val="15000"/>
+                </a:schemeClr>
+              </a:solidFill>
+            </a:endParaRPr>
+          </a:p>
+          <a:p>
+            <a:endParaRPr lang="da-DK" dirty="0">
+              <a:solidFill>
+                <a:schemeClr val="tx1">
+                  <a:lumMod val="85000"/>
+                  <a:lumOff val="15000"/>
+                </a:schemeClr>
+              </a:solidFill>
+            </a:endParaRPr>
+          </a:p>
+          <a:p>
+            <a:endParaRPr lang="da-DK" dirty="0">
+              <a:solidFill>
+                <a:schemeClr val="tx1">
+                  <a:lumMod val="85000"/>
+                  <a:lumOff val="15000"/>
+                </a:schemeClr>
+              </a:solidFill>
+            </a:endParaRPr>
+          </a:p>
+          <a:p>
+            <a:endParaRPr lang="es-ES" dirty="0">
+              <a:solidFill>
+                <a:schemeClr val="tx1">
+                  <a:lumMod val="85000"/>
+                  <a:lumOff val="15000"/>
+                </a:schemeClr>
+              </a:solidFill>
+            </a:endParaRPr>
+          </a:p>
+        </p:txBody>
+      </p:sp>
+      <p:sp>
+        <p:nvSpPr>
+          <p:cNvPr id="3" name="Tekstfelt 2">
+            <a:extLst>
+              <a:ext uri="{FF2B5EF4-FFF2-40B4-BE49-F238E27FC236}">
+                <a16:creationId xmlns:a16="http://schemas.microsoft.com/office/drawing/2014/main" id="{95184FE5-D36E-DAC0-517A-E62667E6B63C}"/>
+              </a:ext>
+            </a:extLst>
+          </p:cNvPr>
+          <p:cNvSpPr txBox="1"/>
+          <p:nvPr/>
+        </p:nvSpPr>
+        <p:spPr>
+          <a:xfrm>
+            <a:off x="664141" y="2079902"/>
+            <a:ext cx="4995513" cy="3139321"/>
+          </a:xfrm>
+          <a:prstGeom prst="rect">
+            <a:avLst/>
+          </a:prstGeom>
+          <a:noFill/>
+        </p:spPr>
+        <p:txBody>
+          <a:bodyPr wrap="square" rtlCol="0">
+            <a:spAutoFit/>
+          </a:bodyPr>
+          <a:lstStyle/>
+          <a:p>
+            <a:pPr marL="285750" indent="-285750">
+              <a:buFont typeface="Arial" panose="020B0604020202020204" pitchFamily="34" charset="0"/>
+              <a:buChar char="•"/>
+            </a:pPr>
+            <a:r>
+              <a:rPr lang="da-DK" dirty="0">
+                <a:solidFill>
+                  <a:schemeClr val="tx1">
+                    <a:lumMod val="85000"/>
+                    <a:lumOff val="15000"/>
+                  </a:schemeClr>
+                </a:solidFill>
+              </a:rPr>
+              <a:t>Mulighed for eget projekt</a:t>
+            </a:r>
+          </a:p>
+          <a:p>
+            <a:pPr marL="285750" indent="-285750">
+              <a:buFont typeface="Arial" panose="020B0604020202020204" pitchFamily="34" charset="0"/>
+              <a:buChar char="•"/>
+            </a:pPr>
+            <a:r>
+              <a:rPr lang="da-DK" dirty="0">
+                <a:solidFill>
+                  <a:schemeClr val="tx1">
+                    <a:lumMod val="85000"/>
+                    <a:lumOff val="15000"/>
+                  </a:schemeClr>
+                </a:solidFill>
+              </a:rPr>
+              <a:t>Læring om AIDA</a:t>
+            </a:r>
+          </a:p>
+          <a:p>
+            <a:pPr marL="285750" indent="-285750">
+              <a:buFont typeface="Arial" panose="020B0604020202020204" pitchFamily="34" charset="0"/>
+              <a:buChar char="•"/>
+            </a:pPr>
+            <a:r>
+              <a:rPr lang="da-DK" dirty="0">
+                <a:solidFill>
+                  <a:schemeClr val="tx1">
+                    <a:lumMod val="85000"/>
+                    <a:lumOff val="15000"/>
+                  </a:schemeClr>
+                </a:solidFill>
+              </a:rPr>
+              <a:t>Modstand blev til effektivisering</a:t>
+            </a:r>
+          </a:p>
+          <a:p>
+            <a:pPr marL="285750" indent="-285750">
+              <a:buFont typeface="Arial" panose="020B0604020202020204" pitchFamily="34" charset="0"/>
+              <a:buChar char="•"/>
+            </a:pPr>
+            <a:r>
+              <a:rPr lang="da-DK" dirty="0">
+                <a:solidFill>
+                  <a:schemeClr val="tx1">
+                    <a:lumMod val="85000"/>
+                    <a:lumOff val="15000"/>
+                  </a:schemeClr>
+                </a:solidFill>
+              </a:rPr>
+              <a:t>Anderledes brug af </a:t>
+            </a:r>
+            <a:r>
+              <a:rPr lang="da-DK" dirty="0" err="1">
+                <a:solidFill>
+                  <a:schemeClr val="tx1">
+                    <a:lumMod val="85000"/>
+                    <a:lumOff val="15000"/>
+                  </a:schemeClr>
+                </a:solidFill>
+              </a:rPr>
+              <a:t>skills</a:t>
+            </a:r>
+            <a:r>
+              <a:rPr lang="da-DK" dirty="0">
+                <a:solidFill>
+                  <a:schemeClr val="tx1">
+                    <a:lumMod val="85000"/>
+                    <a:lumOff val="15000"/>
+                  </a:schemeClr>
+                </a:solidFill>
+              </a:rPr>
+              <a:t>/</a:t>
+            </a:r>
+          </a:p>
+          <a:p>
+            <a:pPr marL="285750" indent="-285750">
+              <a:buFont typeface="Arial" panose="020B0604020202020204" pitchFamily="34" charset="0"/>
+              <a:buChar char="•"/>
+            </a:pPr>
+            <a:r>
+              <a:rPr lang="da-DK" dirty="0">
+                <a:solidFill>
+                  <a:schemeClr val="tx1">
+                    <a:lumMod val="85000"/>
+                    <a:lumOff val="15000"/>
+                  </a:schemeClr>
+                </a:solidFill>
+              </a:rPr>
+              <a:t>Reel virksomhed</a:t>
+            </a:r>
+          </a:p>
+          <a:p>
+            <a:pPr marL="285750" indent="-285750">
+              <a:buFont typeface="Arial" panose="020B0604020202020204" pitchFamily="34" charset="0"/>
+              <a:buChar char="•"/>
+            </a:pPr>
+            <a:r>
+              <a:rPr lang="da-DK" dirty="0">
+                <a:solidFill>
+                  <a:schemeClr val="tx1">
+                    <a:lumMod val="85000"/>
+                    <a:lumOff val="15000"/>
+                  </a:schemeClr>
+                </a:solidFill>
+              </a:rPr>
+              <a:t>Reelt projekt &amp; løsning</a:t>
+            </a:r>
+          </a:p>
+          <a:p>
+            <a:endParaRPr lang="da-DK" dirty="0">
+              <a:solidFill>
+                <a:schemeClr val="tx1">
+                  <a:lumMod val="85000"/>
+                  <a:lumOff val="15000"/>
+                </a:schemeClr>
+              </a:solidFill>
+            </a:endParaRPr>
+          </a:p>
+          <a:p>
+            <a:endParaRPr lang="da-DK" dirty="0">
+              <a:solidFill>
+                <a:schemeClr val="tx1">
+                  <a:lumMod val="85000"/>
+                  <a:lumOff val="15000"/>
+                </a:schemeClr>
+              </a:solidFill>
+            </a:endParaRPr>
+          </a:p>
+          <a:p>
+            <a:endParaRPr lang="da-DK" dirty="0">
+              <a:solidFill>
+                <a:schemeClr val="tx1">
+                  <a:lumMod val="85000"/>
+                  <a:lumOff val="15000"/>
+                </a:schemeClr>
+              </a:solidFill>
+            </a:endParaRPr>
+          </a:p>
+          <a:p>
+            <a:endParaRPr lang="da-DK" dirty="0">
+              <a:solidFill>
+                <a:schemeClr val="tx1">
+                  <a:lumMod val="85000"/>
+                  <a:lumOff val="15000"/>
+                </a:schemeClr>
+              </a:solidFill>
+            </a:endParaRPr>
+          </a:p>
+          <a:p>
+            <a:endParaRPr lang="es-ES" dirty="0">
+              <a:solidFill>
+                <a:schemeClr val="tx1">
+                  <a:lumMod val="85000"/>
+                  <a:lumOff val="15000"/>
+                </a:schemeClr>
+              </a:solidFill>
+            </a:endParaRPr>
+          </a:p>
+        </p:txBody>
+      </p:sp>
+      <p:sp>
+        <p:nvSpPr>
+          <p:cNvPr id="8" name="Tekstfelt 7">
+            <a:extLst>
+              <a:ext uri="{FF2B5EF4-FFF2-40B4-BE49-F238E27FC236}">
+                <a16:creationId xmlns:a16="http://schemas.microsoft.com/office/drawing/2014/main" id="{E0B0304C-791C-EF8F-192C-2E596F92DC74}"/>
+              </a:ext>
+            </a:extLst>
+          </p:cNvPr>
+          <p:cNvSpPr txBox="1"/>
+          <p:nvPr/>
+        </p:nvSpPr>
+        <p:spPr>
+          <a:xfrm>
+            <a:off x="6378060" y="1658405"/>
+            <a:ext cx="1212783" cy="1754326"/>
+          </a:xfrm>
+          <a:prstGeom prst="rect">
+            <a:avLst/>
+          </a:prstGeom>
+          <a:noFill/>
+        </p:spPr>
+        <p:txBody>
+          <a:bodyPr wrap="square" rtlCol="0">
+            <a:spAutoFit/>
+          </a:bodyPr>
+          <a:lstStyle/>
+          <a:p>
+            <a:r>
+              <a:rPr lang="da-DK" b="1" dirty="0">
+                <a:solidFill>
+                  <a:schemeClr val="tx1">
+                    <a:lumMod val="85000"/>
+                    <a:lumOff val="15000"/>
+                  </a:schemeClr>
+                </a:solidFill>
+              </a:rPr>
+              <a:t>Dårligt</a:t>
+            </a:r>
+          </a:p>
+          <a:p>
+            <a:endParaRPr lang="da-DK" dirty="0">
+              <a:solidFill>
+                <a:schemeClr val="tx1">
+                  <a:lumMod val="85000"/>
+                  <a:lumOff val="15000"/>
+                </a:schemeClr>
+              </a:solidFill>
+            </a:endParaRPr>
+          </a:p>
+          <a:p>
+            <a:endParaRPr lang="da-DK" dirty="0">
+              <a:solidFill>
+                <a:schemeClr val="tx1">
+                  <a:lumMod val="85000"/>
+                  <a:lumOff val="15000"/>
+                </a:schemeClr>
+              </a:solidFill>
+            </a:endParaRPr>
+          </a:p>
+          <a:p>
+            <a:endParaRPr lang="da-DK" dirty="0">
+              <a:solidFill>
+                <a:schemeClr val="tx1">
+                  <a:lumMod val="85000"/>
+                  <a:lumOff val="15000"/>
+                </a:schemeClr>
+              </a:solidFill>
+            </a:endParaRPr>
+          </a:p>
+          <a:p>
+            <a:endParaRPr lang="da-DK" dirty="0">
+              <a:solidFill>
+                <a:schemeClr val="tx1">
+                  <a:lumMod val="85000"/>
+                  <a:lumOff val="15000"/>
+                </a:schemeClr>
+              </a:solidFill>
+            </a:endParaRPr>
+          </a:p>
+          <a:p>
+            <a:endParaRPr lang="es-ES" dirty="0">
+              <a:solidFill>
+                <a:schemeClr val="tx1">
+                  <a:lumMod val="85000"/>
+                  <a:lumOff val="15000"/>
+                </a:schemeClr>
+              </a:solidFill>
+            </a:endParaRPr>
+          </a:p>
+        </p:txBody>
+      </p:sp>
+      <p:sp>
+        <p:nvSpPr>
+          <p:cNvPr id="14" name="Tekstfelt 13">
+            <a:extLst>
+              <a:ext uri="{FF2B5EF4-FFF2-40B4-BE49-F238E27FC236}">
+                <a16:creationId xmlns:a16="http://schemas.microsoft.com/office/drawing/2014/main" id="{14AD9715-B94C-1DE0-5212-DDCFF9AE5029}"/>
+              </a:ext>
+            </a:extLst>
+          </p:cNvPr>
+          <p:cNvSpPr txBox="1"/>
+          <p:nvPr/>
+        </p:nvSpPr>
+        <p:spPr>
+          <a:xfrm>
+            <a:off x="6360153" y="2079902"/>
+            <a:ext cx="4995513" cy="2862322"/>
+          </a:xfrm>
+          <a:prstGeom prst="rect">
+            <a:avLst/>
+          </a:prstGeom>
+          <a:noFill/>
+        </p:spPr>
+        <p:txBody>
+          <a:bodyPr wrap="square" rtlCol="0">
+            <a:spAutoFit/>
+          </a:bodyPr>
+          <a:lstStyle/>
+          <a:p>
+            <a:pPr marL="285750" indent="-285750">
+              <a:buFont typeface="Arial" panose="020B0604020202020204" pitchFamily="34" charset="0"/>
+              <a:buChar char="•"/>
+            </a:pPr>
+            <a:r>
+              <a:rPr lang="da-DK" dirty="0">
+                <a:solidFill>
+                  <a:schemeClr val="tx1">
+                    <a:lumMod val="85000"/>
+                    <a:lumOff val="15000"/>
+                  </a:schemeClr>
+                </a:solidFill>
+              </a:rPr>
+              <a:t>Moodle + Kursusmaterialer</a:t>
+            </a:r>
+          </a:p>
+          <a:p>
+            <a:pPr marL="285750" indent="-285750">
+              <a:buFont typeface="Arial" panose="020B0604020202020204" pitchFamily="34" charset="0"/>
+              <a:buChar char="•"/>
+            </a:pPr>
+            <a:r>
+              <a:rPr lang="da-DK" dirty="0">
+                <a:solidFill>
+                  <a:schemeClr val="tx1">
+                    <a:lumMod val="85000"/>
+                    <a:lumOff val="15000"/>
+                  </a:schemeClr>
+                </a:solidFill>
+              </a:rPr>
+              <a:t>Motivation</a:t>
+            </a:r>
+          </a:p>
+          <a:p>
+            <a:pPr marL="285750" indent="-285750">
+              <a:buFont typeface="Arial" panose="020B0604020202020204" pitchFamily="34" charset="0"/>
+              <a:buChar char="•"/>
+            </a:pPr>
+            <a:r>
+              <a:rPr lang="da-DK" dirty="0">
+                <a:solidFill>
+                  <a:schemeClr val="tx1">
+                    <a:lumMod val="85000"/>
+                    <a:lumOff val="15000"/>
+                  </a:schemeClr>
+                </a:solidFill>
+              </a:rPr>
+              <a:t>Privatliv</a:t>
+            </a:r>
+          </a:p>
+          <a:p>
+            <a:pPr marL="285750" indent="-285750">
+              <a:buFont typeface="Arial" panose="020B0604020202020204" pitchFamily="34" charset="0"/>
+              <a:buChar char="•"/>
+            </a:pPr>
+            <a:r>
+              <a:rPr lang="da-DK" dirty="0">
+                <a:solidFill>
+                  <a:schemeClr val="tx1">
+                    <a:lumMod val="85000"/>
+                    <a:lumOff val="15000"/>
+                  </a:schemeClr>
+                </a:solidFill>
+              </a:rPr>
+              <a:t>1-mandsgruppe</a:t>
+            </a:r>
+          </a:p>
+          <a:p>
+            <a:pPr marL="285750" indent="-285750">
+              <a:buFont typeface="Arial" panose="020B0604020202020204" pitchFamily="34" charset="0"/>
+              <a:buChar char="•"/>
+            </a:pPr>
+            <a:r>
+              <a:rPr lang="da-DK" dirty="0">
+                <a:solidFill>
+                  <a:schemeClr val="tx1">
+                    <a:lumMod val="85000"/>
+                    <a:lumOff val="15000"/>
+                  </a:schemeClr>
+                </a:solidFill>
+              </a:rPr>
+              <a:t>Systemudvikling</a:t>
+            </a:r>
+          </a:p>
+          <a:p>
+            <a:pPr marL="285750" indent="-285750">
+              <a:buFont typeface="Arial" panose="020B0604020202020204" pitchFamily="34" charset="0"/>
+              <a:buChar char="•"/>
+            </a:pPr>
+            <a:r>
+              <a:rPr lang="da-DK" dirty="0">
+                <a:solidFill>
+                  <a:schemeClr val="tx1">
+                    <a:lumMod val="85000"/>
+                    <a:lumOff val="15000"/>
+                  </a:schemeClr>
+                </a:solidFill>
+              </a:rPr>
+              <a:t>Blogposts</a:t>
+            </a:r>
+          </a:p>
+          <a:p>
+            <a:pPr marL="285750" indent="-285750">
+              <a:buFont typeface="Arial" panose="020B0604020202020204" pitchFamily="34" charset="0"/>
+              <a:buChar char="•"/>
+            </a:pPr>
+            <a:r>
+              <a:rPr lang="da-DK" dirty="0">
+                <a:solidFill>
+                  <a:schemeClr val="tx1">
+                    <a:lumMod val="85000"/>
+                    <a:lumOff val="15000"/>
+                  </a:schemeClr>
+                </a:solidFill>
+              </a:rPr>
+              <a:t>Brug af AI (personlig holdning)</a:t>
+            </a:r>
+          </a:p>
+          <a:p>
+            <a:pPr marL="285750" indent="-285750">
+              <a:buFont typeface="Arial" panose="020B0604020202020204" pitchFamily="34" charset="0"/>
+              <a:buChar char="•"/>
+            </a:pPr>
+            <a:r>
+              <a:rPr lang="da-DK" dirty="0">
+                <a:solidFill>
+                  <a:schemeClr val="tx1">
+                    <a:lumMod val="85000"/>
+                    <a:lumOff val="15000"/>
+                  </a:schemeClr>
+                </a:solidFill>
+              </a:rPr>
+              <a:t>Manglende info til folk der ikke benytter Discord / Kursusmaterialer</a:t>
+            </a:r>
+          </a:p>
+          <a:p>
+            <a:pPr marL="285750" indent="-285750">
+              <a:buFont typeface="Arial" panose="020B0604020202020204" pitchFamily="34" charset="0"/>
+              <a:buChar char="•"/>
+            </a:pPr>
+            <a:r>
+              <a:rPr lang="da-DK" dirty="0">
+                <a:solidFill>
+                  <a:schemeClr val="tx1">
+                    <a:lumMod val="85000"/>
+                    <a:lumOff val="15000"/>
+                  </a:schemeClr>
+                </a:solidFill>
+              </a:rPr>
+              <a:t>Klassen på 4. Semester</a:t>
+            </a:r>
+          </a:p>
+        </p:txBody>
+      </p:sp>
+      <p:pic>
+        <p:nvPicPr>
+          <p:cNvPr id="18" name="Billede 17">
+            <a:extLst>
+              <a:ext uri="{FF2B5EF4-FFF2-40B4-BE49-F238E27FC236}">
+                <a16:creationId xmlns:a16="http://schemas.microsoft.com/office/drawing/2014/main" id="{20489389-AE7D-66E8-BB75-7869DB0B405B}"/>
+              </a:ext>
+            </a:extLst>
+          </p:cNvPr>
+          <p:cNvPicPr>
+            <a:picLocks noChangeAspect="1"/>
+          </p:cNvPicPr>
+          <p:nvPr/>
+        </p:nvPicPr>
+        <p:blipFill>
+          <a:blip r:embed="rId2"/>
+          <a:stretch>
+            <a:fillRect/>
+          </a:stretch>
+        </p:blipFill>
+        <p:spPr>
+          <a:xfrm>
+            <a:off x="1270534" y="3979293"/>
+            <a:ext cx="4358489" cy="2226713"/>
+          </a:xfrm>
+          <a:prstGeom prst="rect">
+            <a:avLst/>
+          </a:prstGeom>
+        </p:spPr>
+      </p:pic>
+    </p:spTree>
+    <p:extLst>
+      <p:ext uri="{BB962C8B-B14F-4D97-AF65-F5344CB8AC3E}">
+        <p14:creationId xmlns:p14="http://schemas.microsoft.com/office/powerpoint/2010/main" val="1386711761"/>
+      </p:ext>
+    </p:extLst>
+  </p:cSld>
+  <p:clrMapOvr>
+    <a:masterClrMapping/>
+  </p:clrMapOvr>
+</p:sld>
+</file>
+
+<file path=ppt/slides/slide11.xml><?xml version="1.0" encoding="utf-8"?>
+<p:sld xmlns:a="http://schemas.openxmlformats.org/drawingml/2006/main" xmlns:r="http://schemas.openxmlformats.org/officeDocument/2006/relationships" xmlns:p="http://schemas.openxmlformats.org/presentationml/2006/main">
+  <p:cSld>
+    <p:spTree>
+      <p:nvGrpSpPr>
+        <p:cNvPr id="1" name="">
+          <a:extLst>
+            <a:ext uri="{FF2B5EF4-FFF2-40B4-BE49-F238E27FC236}">
+              <a16:creationId xmlns:a16="http://schemas.microsoft.com/office/drawing/2014/main" id="{AE864D1A-AE31-D000-B9A3-8F5341C16DA5}"/>
+            </a:ext>
+          </a:extLst>
+        </p:cNvPr>
+        <p:cNvGrpSpPr/>
+        <p:nvPr/>
+      </p:nvGrpSpPr>
+      <p:grpSpPr>
+        <a:xfrm>
+          <a:off x="0" y="0"/>
+          <a:ext cx="0" cy="0"/>
+          <a:chOff x="0" y="0"/>
+          <a:chExt cx="0" cy="0"/>
+        </a:xfrm>
+      </p:grpSpPr>
+      <p:sp>
+        <p:nvSpPr>
+          <p:cNvPr id="7" name="Rektangel 6">
+            <a:extLst>
+              <a:ext uri="{FF2B5EF4-FFF2-40B4-BE49-F238E27FC236}">
+                <a16:creationId xmlns:a16="http://schemas.microsoft.com/office/drawing/2014/main" id="{5685FE34-4EBC-E679-9240-706BAEF0EBC0}"/>
+              </a:ext>
+            </a:extLst>
+          </p:cNvPr>
+          <p:cNvSpPr/>
+          <p:nvPr/>
+        </p:nvSpPr>
+        <p:spPr>
+          <a:xfrm>
+            <a:off x="145425" y="106610"/>
+            <a:ext cx="11910740" cy="6612242"/>
+          </a:xfrm>
+          <a:prstGeom prst="rect">
+            <a:avLst/>
+          </a:prstGeom>
+          <a:ln w="317500">
+            <a:solidFill>
+              <a:srgbClr val="344B38"/>
+            </a:solidFill>
+          </a:ln>
+        </p:spPr>
+        <p:style>
+          <a:lnRef idx="2">
+            <a:schemeClr val="accent3"/>
+          </a:lnRef>
+          <a:fillRef idx="1">
+            <a:schemeClr val="lt1"/>
+          </a:fillRef>
+          <a:effectRef idx="0">
+            <a:schemeClr val="accent3"/>
+          </a:effectRef>
+          <a:fontRef idx="minor">
+            <a:schemeClr val="dk1"/>
+          </a:fontRef>
+        </p:style>
+        <p:txBody>
+          <a:bodyPr rtlCol="0" anchor="ctr"/>
+          <a:lstStyle/>
+          <a:p>
+            <a:pPr algn="ctr"/>
+            <a:endParaRPr lang="es-ES"/>
+          </a:p>
+        </p:txBody>
+      </p:sp>
+      <p:sp>
+        <p:nvSpPr>
+          <p:cNvPr id="9" name="Tekstfelt 8">
+            <a:extLst>
+              <a:ext uri="{FF2B5EF4-FFF2-40B4-BE49-F238E27FC236}">
+                <a16:creationId xmlns:a16="http://schemas.microsoft.com/office/drawing/2014/main" id="{480F5195-5759-704F-8B37-6F68112FB2EA}"/>
+              </a:ext>
+            </a:extLst>
+          </p:cNvPr>
+          <p:cNvSpPr txBox="1"/>
+          <p:nvPr/>
+        </p:nvSpPr>
+        <p:spPr>
+          <a:xfrm>
+            <a:off x="664143" y="651994"/>
+            <a:ext cx="5774634" cy="461665"/>
+          </a:xfrm>
+          <a:prstGeom prst="rect">
+            <a:avLst/>
+          </a:prstGeom>
+          <a:noFill/>
+        </p:spPr>
+        <p:txBody>
+          <a:bodyPr wrap="square" rtlCol="0">
+            <a:spAutoFit/>
+          </a:bodyPr>
+          <a:lstStyle/>
+          <a:p>
+            <a:r>
+              <a:rPr lang="da-DK" sz="2400" b="1" dirty="0">
+                <a:solidFill>
+                  <a:schemeClr val="tx1">
+                    <a:lumMod val="85000"/>
+                    <a:lumOff val="15000"/>
+                  </a:schemeClr>
+                </a:solidFill>
+              </a:rPr>
+              <a:t>Fremtid for Engestofte &amp; mig selv</a:t>
+            </a:r>
+            <a:endParaRPr lang="es-ES" sz="2400" b="1" dirty="0">
+              <a:solidFill>
+                <a:schemeClr val="tx1">
+                  <a:lumMod val="85000"/>
+                  <a:lumOff val="15000"/>
+                </a:schemeClr>
+              </a:solidFill>
+            </a:endParaRPr>
+          </a:p>
+        </p:txBody>
+      </p:sp>
+      <p:cxnSp>
+        <p:nvCxnSpPr>
+          <p:cNvPr id="12" name="Lige forbindelse 11">
+            <a:extLst>
+              <a:ext uri="{FF2B5EF4-FFF2-40B4-BE49-F238E27FC236}">
+                <a16:creationId xmlns:a16="http://schemas.microsoft.com/office/drawing/2014/main" id="{E6232E16-0443-BA25-4451-4FC65D18DE9C}"/>
+              </a:ext>
+            </a:extLst>
+          </p:cNvPr>
+          <p:cNvCxnSpPr>
+            <a:cxnSpLocks/>
+          </p:cNvCxnSpPr>
+          <p:nvPr/>
+        </p:nvCxnSpPr>
+        <p:spPr>
+          <a:xfrm>
+            <a:off x="766946" y="1238183"/>
+            <a:ext cx="2928754" cy="0"/>
+          </a:xfrm>
+          <a:prstGeom prst="line">
+            <a:avLst/>
+          </a:prstGeom>
+          <a:ln w="28575" cap="flat" cmpd="sng" algn="ctr">
+            <a:solidFill>
+              <a:srgbClr val="344B38"/>
+            </a:solidFill>
+            <a:prstDash val="dash"/>
+            <a:round/>
+            <a:headEnd type="none" w="med" len="med"/>
+            <a:tailEnd type="none" w="med" len="med"/>
+          </a:ln>
+        </p:spPr>
+        <p:style>
+          <a:lnRef idx="0">
+            <a:scrgbClr r="0" g="0" b="0"/>
+          </a:lnRef>
+          <a:fillRef idx="0">
+            <a:scrgbClr r="0" g="0" b="0"/>
+          </a:fillRef>
+          <a:effectRef idx="0">
+            <a:scrgbClr r="0" g="0" b="0"/>
+          </a:effectRef>
+          <a:fontRef idx="minor">
+            <a:schemeClr val="tx1"/>
+          </a:fontRef>
+        </p:style>
+      </p:cxnSp>
+      <p:sp>
+        <p:nvSpPr>
+          <p:cNvPr id="6" name="Tekstfelt 5">
+            <a:extLst>
+              <a:ext uri="{FF2B5EF4-FFF2-40B4-BE49-F238E27FC236}">
+                <a16:creationId xmlns:a16="http://schemas.microsoft.com/office/drawing/2014/main" id="{954E8337-FDDE-AD61-CCA0-5B2CDC646507}"/>
+              </a:ext>
+            </a:extLst>
+          </p:cNvPr>
+          <p:cNvSpPr txBox="1"/>
+          <p:nvPr/>
+        </p:nvSpPr>
+        <p:spPr>
+          <a:xfrm>
+            <a:off x="664143" y="1659043"/>
+            <a:ext cx="2560320" cy="1754326"/>
+          </a:xfrm>
+          <a:prstGeom prst="rect">
+            <a:avLst/>
+          </a:prstGeom>
+          <a:noFill/>
+        </p:spPr>
+        <p:txBody>
+          <a:bodyPr wrap="square" rtlCol="0">
+            <a:spAutoFit/>
+          </a:bodyPr>
+          <a:lstStyle/>
+          <a:p>
+            <a:r>
+              <a:rPr lang="da-DK" b="1" dirty="0">
+                <a:solidFill>
+                  <a:schemeClr val="tx1">
+                    <a:lumMod val="85000"/>
+                    <a:lumOff val="15000"/>
+                  </a:schemeClr>
+                </a:solidFill>
+              </a:rPr>
+              <a:t>Engestofte Gods</a:t>
+            </a:r>
+          </a:p>
+          <a:p>
+            <a:endParaRPr lang="da-DK" dirty="0">
+              <a:solidFill>
+                <a:schemeClr val="tx1">
+                  <a:lumMod val="85000"/>
+                  <a:lumOff val="15000"/>
+                </a:schemeClr>
+              </a:solidFill>
+            </a:endParaRPr>
+          </a:p>
+          <a:p>
+            <a:endParaRPr lang="da-DK" dirty="0">
+              <a:solidFill>
+                <a:schemeClr val="tx1">
+                  <a:lumMod val="85000"/>
+                  <a:lumOff val="15000"/>
+                </a:schemeClr>
+              </a:solidFill>
+            </a:endParaRPr>
+          </a:p>
+          <a:p>
+            <a:endParaRPr lang="da-DK" dirty="0">
+              <a:solidFill>
+                <a:schemeClr val="tx1">
+                  <a:lumMod val="85000"/>
+                  <a:lumOff val="15000"/>
+                </a:schemeClr>
+              </a:solidFill>
+            </a:endParaRPr>
+          </a:p>
+          <a:p>
+            <a:endParaRPr lang="da-DK" dirty="0">
+              <a:solidFill>
+                <a:schemeClr val="tx1">
+                  <a:lumMod val="85000"/>
+                  <a:lumOff val="15000"/>
+                </a:schemeClr>
+              </a:solidFill>
+            </a:endParaRPr>
+          </a:p>
+          <a:p>
+            <a:endParaRPr lang="es-ES" dirty="0">
+              <a:solidFill>
+                <a:schemeClr val="tx1">
+                  <a:lumMod val="85000"/>
+                  <a:lumOff val="15000"/>
+                </a:schemeClr>
+              </a:solidFill>
+            </a:endParaRPr>
+          </a:p>
+        </p:txBody>
+      </p:sp>
+      <p:sp>
+        <p:nvSpPr>
+          <p:cNvPr id="3" name="Tekstfelt 2">
+            <a:extLst>
+              <a:ext uri="{FF2B5EF4-FFF2-40B4-BE49-F238E27FC236}">
+                <a16:creationId xmlns:a16="http://schemas.microsoft.com/office/drawing/2014/main" id="{87CAAD0D-3B53-2D9E-A140-F7A8A078D4D5}"/>
+              </a:ext>
+            </a:extLst>
+          </p:cNvPr>
+          <p:cNvSpPr txBox="1"/>
+          <p:nvPr/>
+        </p:nvSpPr>
+        <p:spPr>
+          <a:xfrm>
+            <a:off x="664141" y="2079902"/>
+            <a:ext cx="4995513" cy="3693319"/>
+          </a:xfrm>
+          <a:prstGeom prst="rect">
+            <a:avLst/>
+          </a:prstGeom>
+          <a:noFill/>
+        </p:spPr>
+        <p:txBody>
+          <a:bodyPr wrap="square" rtlCol="0">
+            <a:spAutoFit/>
+          </a:bodyPr>
+          <a:lstStyle/>
+          <a:p>
+            <a:pPr marL="285750" indent="-285750">
+              <a:buFont typeface="Arial" panose="020B0604020202020204" pitchFamily="34" charset="0"/>
+              <a:buChar char="•"/>
+            </a:pPr>
+            <a:r>
+              <a:rPr lang="da-DK" dirty="0">
+                <a:solidFill>
+                  <a:schemeClr val="tx1">
+                    <a:lumMod val="85000"/>
+                    <a:lumOff val="15000"/>
+                  </a:schemeClr>
+                </a:solidFill>
+              </a:rPr>
+              <a:t>Omskrivning af projektet</a:t>
+            </a:r>
+          </a:p>
+          <a:p>
+            <a:pPr marL="285750" indent="-285750">
+              <a:buFont typeface="Arial" panose="020B0604020202020204" pitchFamily="34" charset="0"/>
+              <a:buChar char="•"/>
+            </a:pPr>
+            <a:r>
+              <a:rPr lang="da-DK" dirty="0" err="1">
+                <a:solidFill>
+                  <a:schemeClr val="tx1">
+                    <a:lumMod val="85000"/>
+                    <a:lumOff val="15000"/>
+                  </a:schemeClr>
+                </a:solidFill>
+              </a:rPr>
+              <a:t>Trello</a:t>
+            </a:r>
+            <a:r>
+              <a:rPr lang="da-DK" dirty="0">
+                <a:solidFill>
+                  <a:schemeClr val="tx1">
+                    <a:lumMod val="85000"/>
+                    <a:lumOff val="15000"/>
+                  </a:schemeClr>
+                </a:solidFill>
+              </a:rPr>
+              <a:t> integration (Source of </a:t>
+            </a:r>
+            <a:r>
+              <a:rPr lang="da-DK" dirty="0" err="1">
+                <a:solidFill>
+                  <a:schemeClr val="tx1">
+                    <a:lumMod val="85000"/>
+                    <a:lumOff val="15000"/>
+                  </a:schemeClr>
+                </a:solidFill>
+              </a:rPr>
+              <a:t>Truth</a:t>
+            </a:r>
+            <a:r>
+              <a:rPr lang="da-DK" dirty="0">
+                <a:solidFill>
+                  <a:schemeClr val="tx1">
+                    <a:lumMod val="85000"/>
+                    <a:lumOff val="15000"/>
+                  </a:schemeClr>
+                </a:solidFill>
+              </a:rPr>
+              <a:t>)</a:t>
+            </a:r>
+          </a:p>
+          <a:p>
+            <a:pPr marL="285750" indent="-285750">
+              <a:buFont typeface="Arial" panose="020B0604020202020204" pitchFamily="34" charset="0"/>
+              <a:buChar char="•"/>
+            </a:pPr>
+            <a:r>
+              <a:rPr lang="da-DK" dirty="0">
+                <a:solidFill>
+                  <a:schemeClr val="tx1">
+                    <a:lumMod val="85000"/>
+                    <a:lumOff val="15000"/>
+                  </a:schemeClr>
+                </a:solidFill>
+              </a:rPr>
+              <a:t>Analyse &amp; personlig snak med Engestofte Gods</a:t>
+            </a:r>
+          </a:p>
+          <a:p>
+            <a:pPr marL="285750" indent="-285750">
+              <a:buFont typeface="Arial" panose="020B0604020202020204" pitchFamily="34" charset="0"/>
+              <a:buChar char="•"/>
+            </a:pPr>
+            <a:r>
+              <a:rPr lang="da-DK" dirty="0">
+                <a:solidFill>
+                  <a:schemeClr val="tx1">
+                    <a:lumMod val="85000"/>
+                    <a:lumOff val="15000"/>
+                  </a:schemeClr>
+                </a:solidFill>
+              </a:rPr>
+              <a:t>Integration af tests &amp; håndtering heraf</a:t>
+            </a:r>
+          </a:p>
+          <a:p>
+            <a:pPr marL="285750" indent="-285750">
+              <a:buFont typeface="Arial" panose="020B0604020202020204" pitchFamily="34" charset="0"/>
+              <a:buChar char="•"/>
+            </a:pPr>
+            <a:r>
+              <a:rPr lang="da-DK" dirty="0">
+                <a:solidFill>
+                  <a:schemeClr val="tx1">
+                    <a:lumMod val="85000"/>
+                    <a:lumOff val="15000"/>
+                  </a:schemeClr>
+                </a:solidFill>
+              </a:rPr>
+              <a:t>Langsom integration for at mindste påvirkning af kunder</a:t>
+            </a:r>
+          </a:p>
+          <a:p>
+            <a:pPr marL="285750" indent="-285750">
+              <a:buFont typeface="Arial" panose="020B0604020202020204" pitchFamily="34" charset="0"/>
+              <a:buChar char="•"/>
+            </a:pPr>
+            <a:r>
+              <a:rPr lang="da-DK" dirty="0">
+                <a:solidFill>
+                  <a:schemeClr val="tx1">
+                    <a:lumMod val="85000"/>
+                    <a:lumOff val="15000"/>
+                  </a:schemeClr>
+                </a:solidFill>
+              </a:rPr>
+              <a:t>Data, analyse, estimeret omkostninger osv.</a:t>
+            </a:r>
+          </a:p>
+          <a:p>
+            <a:pPr marL="285750" indent="-285750">
+              <a:buFont typeface="Arial" panose="020B0604020202020204" pitchFamily="34" charset="0"/>
+              <a:buChar char="•"/>
+            </a:pPr>
+            <a:endParaRPr lang="da-DK" dirty="0">
+              <a:solidFill>
+                <a:schemeClr val="tx1">
+                  <a:lumMod val="85000"/>
+                  <a:lumOff val="15000"/>
+                </a:schemeClr>
+              </a:solidFill>
+            </a:endParaRPr>
+          </a:p>
+          <a:p>
+            <a:endParaRPr lang="da-DK" dirty="0">
+              <a:solidFill>
+                <a:schemeClr val="tx1">
+                  <a:lumMod val="85000"/>
+                  <a:lumOff val="15000"/>
+                </a:schemeClr>
+              </a:solidFill>
+            </a:endParaRPr>
+          </a:p>
+          <a:p>
+            <a:endParaRPr lang="da-DK" dirty="0">
+              <a:solidFill>
+                <a:schemeClr val="tx1">
+                  <a:lumMod val="85000"/>
+                  <a:lumOff val="15000"/>
+                </a:schemeClr>
+              </a:solidFill>
+            </a:endParaRPr>
+          </a:p>
+          <a:p>
+            <a:endParaRPr lang="da-DK" dirty="0">
+              <a:solidFill>
+                <a:schemeClr val="tx1">
+                  <a:lumMod val="85000"/>
+                  <a:lumOff val="15000"/>
+                </a:schemeClr>
+              </a:solidFill>
+            </a:endParaRPr>
+          </a:p>
+          <a:p>
+            <a:endParaRPr lang="es-ES" dirty="0">
+              <a:solidFill>
+                <a:schemeClr val="tx1">
+                  <a:lumMod val="85000"/>
+                  <a:lumOff val="15000"/>
+                </a:schemeClr>
+              </a:solidFill>
+            </a:endParaRPr>
+          </a:p>
+        </p:txBody>
+      </p:sp>
+      <p:sp>
+        <p:nvSpPr>
+          <p:cNvPr id="8" name="Tekstfelt 7">
+            <a:extLst>
+              <a:ext uri="{FF2B5EF4-FFF2-40B4-BE49-F238E27FC236}">
+                <a16:creationId xmlns:a16="http://schemas.microsoft.com/office/drawing/2014/main" id="{B63543B3-DBDF-0A31-1371-A44237319520}"/>
+              </a:ext>
+            </a:extLst>
+          </p:cNvPr>
+          <p:cNvSpPr txBox="1"/>
+          <p:nvPr/>
+        </p:nvSpPr>
+        <p:spPr>
+          <a:xfrm>
+            <a:off x="6378060" y="1658405"/>
+            <a:ext cx="2737064" cy="1754326"/>
+          </a:xfrm>
+          <a:prstGeom prst="rect">
+            <a:avLst/>
+          </a:prstGeom>
+          <a:noFill/>
+        </p:spPr>
+        <p:txBody>
+          <a:bodyPr wrap="square" rtlCol="0">
+            <a:spAutoFit/>
+          </a:bodyPr>
+          <a:lstStyle/>
+          <a:p>
+            <a:r>
+              <a:rPr lang="da-DK" b="1" dirty="0">
+                <a:solidFill>
+                  <a:schemeClr val="tx1">
+                    <a:lumMod val="85000"/>
+                    <a:lumOff val="15000"/>
+                  </a:schemeClr>
+                </a:solidFill>
+              </a:rPr>
+              <a:t>Personlig fremtid</a:t>
+            </a:r>
+          </a:p>
+          <a:p>
+            <a:endParaRPr lang="da-DK" dirty="0">
+              <a:solidFill>
+                <a:schemeClr val="tx1">
+                  <a:lumMod val="85000"/>
+                  <a:lumOff val="15000"/>
+                </a:schemeClr>
+              </a:solidFill>
+            </a:endParaRPr>
+          </a:p>
+          <a:p>
+            <a:endParaRPr lang="da-DK" dirty="0">
+              <a:solidFill>
+                <a:schemeClr val="tx1">
+                  <a:lumMod val="85000"/>
+                  <a:lumOff val="15000"/>
+                </a:schemeClr>
+              </a:solidFill>
+            </a:endParaRPr>
+          </a:p>
+          <a:p>
+            <a:endParaRPr lang="da-DK" dirty="0">
+              <a:solidFill>
+                <a:schemeClr val="tx1">
+                  <a:lumMod val="85000"/>
+                  <a:lumOff val="15000"/>
+                </a:schemeClr>
+              </a:solidFill>
+            </a:endParaRPr>
+          </a:p>
+          <a:p>
+            <a:endParaRPr lang="da-DK" dirty="0">
+              <a:solidFill>
+                <a:schemeClr val="tx1">
+                  <a:lumMod val="85000"/>
+                  <a:lumOff val="15000"/>
+                </a:schemeClr>
+              </a:solidFill>
+            </a:endParaRPr>
+          </a:p>
+          <a:p>
+            <a:endParaRPr lang="es-ES" dirty="0">
+              <a:solidFill>
+                <a:schemeClr val="tx1">
+                  <a:lumMod val="85000"/>
+                  <a:lumOff val="15000"/>
+                </a:schemeClr>
+              </a:solidFill>
+            </a:endParaRPr>
+          </a:p>
+        </p:txBody>
+      </p:sp>
+      <p:sp>
+        <p:nvSpPr>
+          <p:cNvPr id="14" name="Tekstfelt 13">
+            <a:extLst>
+              <a:ext uri="{FF2B5EF4-FFF2-40B4-BE49-F238E27FC236}">
+                <a16:creationId xmlns:a16="http://schemas.microsoft.com/office/drawing/2014/main" id="{18FD6983-E35C-C2BB-1CDD-F14E05E37C41}"/>
+              </a:ext>
+            </a:extLst>
+          </p:cNvPr>
+          <p:cNvSpPr txBox="1"/>
+          <p:nvPr/>
+        </p:nvSpPr>
+        <p:spPr>
+          <a:xfrm>
+            <a:off x="6360153" y="2079902"/>
+            <a:ext cx="4995513" cy="2308324"/>
+          </a:xfrm>
+          <a:prstGeom prst="rect">
+            <a:avLst/>
+          </a:prstGeom>
+          <a:noFill/>
+        </p:spPr>
+        <p:txBody>
+          <a:bodyPr wrap="square" rtlCol="0">
+            <a:spAutoFit/>
+          </a:bodyPr>
+          <a:lstStyle/>
+          <a:p>
+            <a:pPr marL="285750" indent="-285750">
+              <a:buFont typeface="Arial" panose="020B0604020202020204" pitchFamily="34" charset="0"/>
+              <a:buChar char="•"/>
+            </a:pPr>
+            <a:r>
+              <a:rPr lang="da-DK" dirty="0">
+                <a:solidFill>
+                  <a:schemeClr val="tx1">
+                    <a:lumMod val="85000"/>
+                    <a:lumOff val="15000"/>
+                  </a:schemeClr>
+                </a:solidFill>
+              </a:rPr>
+              <a:t>Håber AI hype kommer lidt ned</a:t>
+            </a:r>
+          </a:p>
+          <a:p>
+            <a:pPr marL="285750" indent="-285750">
+              <a:buFont typeface="Arial" panose="020B0604020202020204" pitchFamily="34" charset="0"/>
+              <a:buChar char="•"/>
+            </a:pPr>
+            <a:r>
+              <a:rPr lang="da-DK" dirty="0">
+                <a:solidFill>
+                  <a:schemeClr val="tx1">
+                    <a:lumMod val="85000"/>
+                    <a:lumOff val="15000"/>
+                  </a:schemeClr>
+                </a:solidFill>
+              </a:rPr>
+              <a:t>Kodning er sjovt - </a:t>
+            </a:r>
+            <a:r>
+              <a:rPr lang="da-DK" dirty="0" err="1">
+                <a:solidFill>
+                  <a:schemeClr val="tx1">
+                    <a:lumMod val="85000"/>
+                    <a:lumOff val="15000"/>
+                  </a:schemeClr>
+                </a:solidFill>
+              </a:rPr>
+              <a:t>prompting</a:t>
+            </a:r>
+            <a:r>
+              <a:rPr lang="da-DK" dirty="0">
+                <a:solidFill>
+                  <a:schemeClr val="tx1">
+                    <a:lumMod val="85000"/>
+                    <a:lumOff val="15000"/>
+                  </a:schemeClr>
+                </a:solidFill>
+              </a:rPr>
+              <a:t> er ikke…</a:t>
+            </a:r>
+          </a:p>
+          <a:p>
+            <a:pPr marL="285750" indent="-285750">
+              <a:buFont typeface="Arial" panose="020B0604020202020204" pitchFamily="34" charset="0"/>
+              <a:buChar char="•"/>
+            </a:pPr>
+            <a:r>
+              <a:rPr lang="da-DK" dirty="0">
+                <a:solidFill>
+                  <a:schemeClr val="tx1">
+                    <a:lumMod val="85000"/>
+                    <a:lumOff val="15000"/>
+                  </a:schemeClr>
+                </a:solidFill>
+              </a:rPr>
+              <a:t>Old School start på HTX</a:t>
+            </a:r>
+          </a:p>
+          <a:p>
+            <a:pPr marL="285750" indent="-285750">
+              <a:buFont typeface="Arial" panose="020B0604020202020204" pitchFamily="34" charset="0"/>
+              <a:buChar char="•"/>
+            </a:pPr>
+            <a:r>
+              <a:rPr lang="da-DK" dirty="0">
+                <a:solidFill>
+                  <a:schemeClr val="tx1">
+                    <a:lumMod val="85000"/>
+                    <a:lumOff val="15000"/>
+                  </a:schemeClr>
+                </a:solidFill>
+              </a:rPr>
+              <a:t>Effektiv brug af AI fremfor AI som løsning</a:t>
+            </a:r>
+          </a:p>
+          <a:p>
+            <a:pPr marL="285750" indent="-285750">
+              <a:buFont typeface="Arial" panose="020B0604020202020204" pitchFamily="34" charset="0"/>
+              <a:buChar char="•"/>
+            </a:pPr>
+            <a:r>
+              <a:rPr lang="da-DK" dirty="0">
+                <a:solidFill>
+                  <a:schemeClr val="tx1">
+                    <a:lumMod val="85000"/>
+                    <a:lumOff val="15000"/>
+                  </a:schemeClr>
+                </a:solidFill>
+              </a:rPr>
+              <a:t>Bedre forståelse for hvordan AI kan integreres i virksomheder</a:t>
+            </a:r>
+          </a:p>
+          <a:p>
+            <a:pPr marL="285750" indent="-285750">
+              <a:buFont typeface="Arial" panose="020B0604020202020204" pitchFamily="34" charset="0"/>
+              <a:buChar char="•"/>
+            </a:pPr>
+            <a:endParaRPr lang="da-DK" dirty="0">
+              <a:solidFill>
+                <a:schemeClr val="tx1">
+                  <a:lumMod val="85000"/>
+                  <a:lumOff val="15000"/>
+                </a:schemeClr>
+              </a:solidFill>
+            </a:endParaRPr>
+          </a:p>
+          <a:p>
+            <a:pPr marL="285750" indent="-285750">
+              <a:buFont typeface="Arial" panose="020B0604020202020204" pitchFamily="34" charset="0"/>
+              <a:buChar char="•"/>
+            </a:pPr>
+            <a:endParaRPr lang="da-DK" dirty="0">
+              <a:solidFill>
+                <a:schemeClr val="tx1">
+                  <a:lumMod val="85000"/>
+                  <a:lumOff val="15000"/>
+                </a:schemeClr>
+              </a:solidFill>
+            </a:endParaRPr>
+          </a:p>
+        </p:txBody>
+      </p:sp>
+      <p:pic>
+        <p:nvPicPr>
+          <p:cNvPr id="4" name="Billede 3">
+            <a:extLst>
+              <a:ext uri="{FF2B5EF4-FFF2-40B4-BE49-F238E27FC236}">
+                <a16:creationId xmlns:a16="http://schemas.microsoft.com/office/drawing/2014/main" id="{46C48863-F7B3-A655-823A-69A38760F37D}"/>
+              </a:ext>
+            </a:extLst>
+          </p:cNvPr>
+          <p:cNvPicPr>
+            <a:picLocks noChangeAspect="1"/>
+          </p:cNvPicPr>
+          <p:nvPr/>
+        </p:nvPicPr>
+        <p:blipFill>
+          <a:blip r:embed="rId2"/>
+          <a:stretch>
+            <a:fillRect/>
+          </a:stretch>
+        </p:blipFill>
+        <p:spPr>
+          <a:xfrm>
+            <a:off x="5557620" y="3769062"/>
+            <a:ext cx="4847289" cy="2592456"/>
+          </a:xfrm>
+          <a:prstGeom prst="rect">
+            <a:avLst/>
+          </a:prstGeom>
+        </p:spPr>
+      </p:pic>
+    </p:spTree>
+    <p:extLst>
+      <p:ext uri="{BB962C8B-B14F-4D97-AF65-F5344CB8AC3E}">
+        <p14:creationId xmlns:p14="http://schemas.microsoft.com/office/powerpoint/2010/main" val="18316513"/>
+      </p:ext>
+    </p:extLst>
+  </p:cSld>
+  <p:clrMapOvr>
+    <a:masterClrMapping/>
+  </p:clrMapOvr>
+</p:sld>
+</file>
+
+<file path=ppt/slides/slide12.xml><?xml version="1.0" encoding="utf-8"?>
+<p:sld xmlns:a="http://schemas.openxmlformats.org/drawingml/2006/main" xmlns:r="http://schemas.openxmlformats.org/officeDocument/2006/relationships" xmlns:p="http://schemas.openxmlformats.org/presentationml/2006/main">
+  <p:cSld>
+    <p:spTree>
+      <p:nvGrpSpPr>
+        <p:cNvPr id="1" name="">
+          <a:extLst>
+            <a:ext uri="{FF2B5EF4-FFF2-40B4-BE49-F238E27FC236}">
               <a16:creationId xmlns:a16="http://schemas.microsoft.com/office/drawing/2014/main" id="{2A5F38E9-E043-1AC8-7389-9529CCD0C61A}"/>
             </a:ext>
           </a:extLst>
@@ -3719,7 +5280,7 @@
                   </a:schemeClr>
                 </a:solidFill>
               </a:rPr>
-              <a:t>Tak for denne gang!</a:t>
+              <a:t>Ellers opfølgende spørgsmål</a:t>
             </a:r>
           </a:p>
         </p:txBody>
@@ -5754,7 +7315,7 @@
         <p:cNvPr id="1" name="">
           <a:extLst>
             <a:ext uri="{FF2B5EF4-FFF2-40B4-BE49-F238E27FC236}">
-              <a16:creationId xmlns:a16="http://schemas.microsoft.com/office/drawing/2014/main" id="{247CAD9B-C58F-D99C-9896-B5284F227A92}"/>
+              <a16:creationId xmlns:a16="http://schemas.microsoft.com/office/drawing/2014/main" id="{9F80190E-E74F-300F-63E6-A0C78E654E6D}"/>
             </a:ext>
           </a:extLst>
         </p:cNvPr>
@@ -5774,7 +7335,7 @@
           <p:cNvPr id="7" name="Rektangel 6">
             <a:extLst>
               <a:ext uri="{FF2B5EF4-FFF2-40B4-BE49-F238E27FC236}">
-                <a16:creationId xmlns:a16="http://schemas.microsoft.com/office/drawing/2014/main" id="{CD5DF329-E31D-F044-6CC6-E0FFC5D8ACE1}"/>
+                <a16:creationId xmlns:a16="http://schemas.microsoft.com/office/drawing/2014/main" id="{323D77E4-EEAD-4ECA-2ED2-7116D9DAD34D}"/>
               </a:ext>
             </a:extLst>
           </p:cNvPr>
@@ -5823,7 +7384,7 @@
           <p:cNvPr id="9" name="Tekstfelt 8">
             <a:extLst>
               <a:ext uri="{FF2B5EF4-FFF2-40B4-BE49-F238E27FC236}">
-                <a16:creationId xmlns:a16="http://schemas.microsoft.com/office/drawing/2014/main" id="{C8160F7D-158E-022F-AAB2-6DFE51006B83}"/>
+                <a16:creationId xmlns:a16="http://schemas.microsoft.com/office/drawing/2014/main" id="{B2F4FCC8-B4E9-A67B-7DE9-7C6545BD8A4D}"/>
               </a:ext>
             </a:extLst>
           </p:cNvPr>
@@ -5855,7 +7416,7 @@
                   </a:schemeClr>
                 </a:solidFill>
               </a:rPr>
-              <a:t>Systemskitse (kort gennemgang)</a:t>
+              <a:t>Skitser</a:t>
             </a:r>
             <a:endParaRPr lang="es-ES" sz="2400" b="1" dirty="0">
               <a:solidFill>
@@ -5873,7 +7434,7 @@
           <p:cNvPr id="12" name="Lige forbindelse 11">
             <a:extLst>
               <a:ext uri="{FF2B5EF4-FFF2-40B4-BE49-F238E27FC236}">
-                <a16:creationId xmlns:a16="http://schemas.microsoft.com/office/drawing/2014/main" id="{AB005B2B-D63B-877C-CB0E-1BD8CF2BF53A}"/>
+                <a16:creationId xmlns:a16="http://schemas.microsoft.com/office/drawing/2014/main" id="{22D3FC39-D795-B7FF-2E30-6603D3D19C0E}"/>
               </a:ext>
             </a:extLst>
           </p:cNvPr>
@@ -5920,6 +7481,430 @@
           <p:cNvPr id="4" name="Billede 3">
             <a:extLst>
               <a:ext uri="{FF2B5EF4-FFF2-40B4-BE49-F238E27FC236}">
+                <a16:creationId xmlns:a16="http://schemas.microsoft.com/office/drawing/2014/main" id="{567FA565-D8F6-19A5-681A-FBBAC87303C0}"/>
+              </a:ext>
+            </a:extLst>
+          </p:cNvPr>
+          <p:cNvPicPr>
+            <a:picLocks noChangeAspect="1"/>
+          </p:cNvPicPr>
+          <p:nvPr/>
+        </p:nvPicPr>
+        <p:blipFill>
+          <a:blip r:embed="rId2"/>
+          <a:stretch>
+            <a:fillRect/>
+          </a:stretch>
+        </p:blipFill>
+        <p:spPr>
+          <a:xfrm>
+            <a:off x="1636294" y="1464352"/>
+            <a:ext cx="8604987" cy="4655156"/>
+          </a:xfrm>
+          <a:prstGeom prst="rect">
+            <a:avLst/>
+          </a:prstGeom>
+        </p:spPr>
+      </p:pic>
+    </p:spTree>
+    <p:extLst>
+      <p:ext uri="{BB962C8B-B14F-4D97-AF65-F5344CB8AC3E}">
+        <p14:creationId xmlns:p14="http://schemas.microsoft.com/office/powerpoint/2010/main" val="1626730431"/>
+      </p:ext>
+    </p:extLst>
+  </p:cSld>
+  <p:clrMapOvr>
+    <a:masterClrMapping/>
+  </p:clrMapOvr>
+</p:sld>
+</file>
+
+<file path=ppt/slides/slide7.xml><?xml version="1.0" encoding="utf-8"?>
+<p:sld xmlns:a="http://schemas.openxmlformats.org/drawingml/2006/main" xmlns:r="http://schemas.openxmlformats.org/officeDocument/2006/relationships" xmlns:p="http://schemas.openxmlformats.org/presentationml/2006/main">
+  <p:cSld>
+    <p:spTree>
+      <p:nvGrpSpPr>
+        <p:cNvPr id="1" name="">
+          <a:extLst>
+            <a:ext uri="{FF2B5EF4-FFF2-40B4-BE49-F238E27FC236}">
+              <a16:creationId xmlns:a16="http://schemas.microsoft.com/office/drawing/2014/main" id="{85558855-07C1-54CC-C9CA-69527123B5EB}"/>
+            </a:ext>
+          </a:extLst>
+        </p:cNvPr>
+        <p:cNvGrpSpPr/>
+        <p:nvPr/>
+      </p:nvGrpSpPr>
+      <p:grpSpPr>
+        <a:xfrm>
+          <a:off x="0" y="0"/>
+          <a:ext cx="0" cy="0"/>
+          <a:chOff x="0" y="0"/>
+          <a:chExt cx="0" cy="0"/>
+        </a:xfrm>
+      </p:grpSpPr>
+      <p:sp>
+        <p:nvSpPr>
+          <p:cNvPr id="7" name="Rektangel 6">
+            <a:extLst>
+              <a:ext uri="{FF2B5EF4-FFF2-40B4-BE49-F238E27FC236}">
+                <a16:creationId xmlns:a16="http://schemas.microsoft.com/office/drawing/2014/main" id="{D2E2B747-D559-7F9D-684A-283D11D293E7}"/>
+              </a:ext>
+            </a:extLst>
+          </p:cNvPr>
+          <p:cNvSpPr/>
+          <p:nvPr/>
+        </p:nvSpPr>
+        <p:spPr>
+          <a:xfrm>
+            <a:off x="145425" y="106610"/>
+            <a:ext cx="11910740" cy="6612242"/>
+          </a:xfrm>
+          <a:prstGeom prst="rect">
+            <a:avLst/>
+          </a:prstGeom>
+          <a:ln w="317500">
+            <a:solidFill>
+              <a:srgbClr val="344B38"/>
+            </a:solidFill>
+          </a:ln>
+        </p:spPr>
+        <p:style>
+          <a:lnRef idx="2">
+            <a:schemeClr val="accent3"/>
+          </a:lnRef>
+          <a:fillRef idx="1">
+            <a:schemeClr val="lt1"/>
+          </a:fillRef>
+          <a:effectRef idx="0">
+            <a:schemeClr val="accent3"/>
+          </a:effectRef>
+          <a:fontRef idx="minor">
+            <a:schemeClr val="dk1"/>
+          </a:fontRef>
+        </p:style>
+        <p:txBody>
+          <a:bodyPr rtlCol="0" anchor="ctr"/>
+          <a:lstStyle/>
+          <a:p>
+            <a:pPr algn="ctr"/>
+            <a:endParaRPr lang="es-ES"/>
+          </a:p>
+        </p:txBody>
+      </p:sp>
+      <p:sp>
+        <p:nvSpPr>
+          <p:cNvPr id="9" name="Tekstfelt 8">
+            <a:extLst>
+              <a:ext uri="{FF2B5EF4-FFF2-40B4-BE49-F238E27FC236}">
+                <a16:creationId xmlns:a16="http://schemas.microsoft.com/office/drawing/2014/main" id="{6D74FF98-63F6-8364-26C5-62F46BCC8B8B}"/>
+              </a:ext>
+            </a:extLst>
+          </p:cNvPr>
+          <p:cNvSpPr txBox="1"/>
+          <p:nvPr/>
+        </p:nvSpPr>
+        <p:spPr>
+          <a:xfrm>
+            <a:off x="664143" y="651994"/>
+            <a:ext cx="5774634" cy="461665"/>
+          </a:xfrm>
+          <a:prstGeom prst="rect">
+            <a:avLst/>
+          </a:prstGeom>
+          <a:noFill/>
+        </p:spPr>
+        <p:txBody>
+          <a:bodyPr wrap="square" rtlCol="0">
+            <a:spAutoFit/>
+          </a:bodyPr>
+          <a:lstStyle/>
+          <a:p>
+            <a:r>
+              <a:rPr lang="da-DK" sz="2400" b="1" dirty="0">
+                <a:solidFill>
+                  <a:schemeClr val="tx1">
+                    <a:lumMod val="85000"/>
+                    <a:lumOff val="15000"/>
+                  </a:schemeClr>
+                </a:solidFill>
+              </a:rPr>
+              <a:t>Skitser</a:t>
+            </a:r>
+            <a:endParaRPr lang="es-ES" sz="2400" b="1" dirty="0">
+              <a:solidFill>
+                <a:schemeClr val="tx1">
+                  <a:lumMod val="85000"/>
+                  <a:lumOff val="15000"/>
+                </a:schemeClr>
+              </a:solidFill>
+            </a:endParaRPr>
+          </a:p>
+        </p:txBody>
+      </p:sp>
+      <p:cxnSp>
+        <p:nvCxnSpPr>
+          <p:cNvPr id="12" name="Lige forbindelse 11">
+            <a:extLst>
+              <a:ext uri="{FF2B5EF4-FFF2-40B4-BE49-F238E27FC236}">
+                <a16:creationId xmlns:a16="http://schemas.microsoft.com/office/drawing/2014/main" id="{5010F84E-2C19-3133-38EC-AEA8E2E81003}"/>
+              </a:ext>
+            </a:extLst>
+          </p:cNvPr>
+          <p:cNvCxnSpPr>
+            <a:cxnSpLocks/>
+          </p:cNvCxnSpPr>
+          <p:nvPr/>
+        </p:nvCxnSpPr>
+        <p:spPr>
+          <a:xfrm>
+            <a:off x="766946" y="1238183"/>
+            <a:ext cx="2928754" cy="0"/>
+          </a:xfrm>
+          <a:prstGeom prst="line">
+            <a:avLst/>
+          </a:prstGeom>
+          <a:ln w="28575" cap="flat" cmpd="sng" algn="ctr">
+            <a:solidFill>
+              <a:srgbClr val="344B38"/>
+            </a:solidFill>
+            <a:prstDash val="dash"/>
+            <a:round/>
+            <a:headEnd type="none" w="med" len="med"/>
+            <a:tailEnd type="none" w="med" len="med"/>
+          </a:ln>
+        </p:spPr>
+        <p:style>
+          <a:lnRef idx="0">
+            <a:scrgbClr r="0" g="0" b="0"/>
+          </a:lnRef>
+          <a:fillRef idx="0">
+            <a:scrgbClr r="0" g="0" b="0"/>
+          </a:fillRef>
+          <a:effectRef idx="0">
+            <a:scrgbClr r="0" g="0" b="0"/>
+          </a:effectRef>
+          <a:fontRef idx="minor">
+            <a:schemeClr val="tx1"/>
+          </a:fontRef>
+        </p:style>
+      </p:cxnSp>
+      <p:pic>
+        <p:nvPicPr>
+          <p:cNvPr id="3" name="Billede 2">
+            <a:extLst>
+              <a:ext uri="{FF2B5EF4-FFF2-40B4-BE49-F238E27FC236}">
+                <a16:creationId xmlns:a16="http://schemas.microsoft.com/office/drawing/2014/main" id="{645E097B-7B1C-C8C2-3E19-5F6626B6E7A7}"/>
+              </a:ext>
+            </a:extLst>
+          </p:cNvPr>
+          <p:cNvPicPr>
+            <a:picLocks noChangeAspect="1"/>
+          </p:cNvPicPr>
+          <p:nvPr/>
+        </p:nvPicPr>
+        <p:blipFill>
+          <a:blip r:embed="rId2"/>
+          <a:stretch>
+            <a:fillRect/>
+          </a:stretch>
+        </p:blipFill>
+        <p:spPr>
+          <a:xfrm>
+            <a:off x="1309036" y="1569735"/>
+            <a:ext cx="9981104" cy="4636271"/>
+          </a:xfrm>
+          <a:prstGeom prst="rect">
+            <a:avLst/>
+          </a:prstGeom>
+        </p:spPr>
+      </p:pic>
+    </p:spTree>
+    <p:extLst>
+      <p:ext uri="{BB962C8B-B14F-4D97-AF65-F5344CB8AC3E}">
+        <p14:creationId xmlns:p14="http://schemas.microsoft.com/office/powerpoint/2010/main" val="16835590"/>
+      </p:ext>
+    </p:extLst>
+  </p:cSld>
+  <p:clrMapOvr>
+    <a:masterClrMapping/>
+  </p:clrMapOvr>
+</p:sld>
+</file>
+
+<file path=ppt/slides/slide8.xml><?xml version="1.0" encoding="utf-8"?>
+<p:sld xmlns:a="http://schemas.openxmlformats.org/drawingml/2006/main" xmlns:r="http://schemas.openxmlformats.org/officeDocument/2006/relationships" xmlns:p="http://schemas.openxmlformats.org/presentationml/2006/main">
+  <p:cSld>
+    <p:spTree>
+      <p:nvGrpSpPr>
+        <p:cNvPr id="1" name="">
+          <a:extLst>
+            <a:ext uri="{FF2B5EF4-FFF2-40B4-BE49-F238E27FC236}">
+              <a16:creationId xmlns:a16="http://schemas.microsoft.com/office/drawing/2014/main" id="{247CAD9B-C58F-D99C-9896-B5284F227A92}"/>
+            </a:ext>
+          </a:extLst>
+        </p:cNvPr>
+        <p:cNvGrpSpPr/>
+        <p:nvPr/>
+      </p:nvGrpSpPr>
+      <p:grpSpPr>
+        <a:xfrm>
+          <a:off x="0" y="0"/>
+          <a:ext cx="0" cy="0"/>
+          <a:chOff x="0" y="0"/>
+          <a:chExt cx="0" cy="0"/>
+        </a:xfrm>
+      </p:grpSpPr>
+      <p:sp>
+        <p:nvSpPr>
+          <p:cNvPr id="7" name="Rektangel 6">
+            <a:extLst>
+              <a:ext uri="{FF2B5EF4-FFF2-40B4-BE49-F238E27FC236}">
+                <a16:creationId xmlns:a16="http://schemas.microsoft.com/office/drawing/2014/main" id="{CD5DF329-E31D-F044-6CC6-E0FFC5D8ACE1}"/>
+              </a:ext>
+            </a:extLst>
+          </p:cNvPr>
+          <p:cNvSpPr/>
+          <p:nvPr/>
+        </p:nvSpPr>
+        <p:spPr>
+          <a:xfrm>
+            <a:off x="145425" y="106610"/>
+            <a:ext cx="11910740" cy="6612242"/>
+          </a:xfrm>
+          <a:prstGeom prst="rect">
+            <a:avLst/>
+          </a:prstGeom>
+          <a:ln w="317500">
+            <a:solidFill>
+              <a:srgbClr val="344B38"/>
+            </a:solidFill>
+          </a:ln>
+        </p:spPr>
+        <p:style>
+          <a:lnRef idx="2">
+            <a:schemeClr val="accent3"/>
+          </a:lnRef>
+          <a:fillRef idx="1">
+            <a:schemeClr val="lt1"/>
+          </a:fillRef>
+          <a:effectRef idx="0">
+            <a:schemeClr val="accent3"/>
+          </a:effectRef>
+          <a:fontRef idx="minor">
+            <a:schemeClr val="dk1"/>
+          </a:fontRef>
+        </p:style>
+        <p:txBody>
+          <a:bodyPr rtlCol="0" anchor="ctr"/>
+          <a:lstStyle/>
+          <a:p>
+            <a:pPr algn="ctr"/>
+            <a:endParaRPr lang="es-ES"/>
+          </a:p>
+        </p:txBody>
+      </p:sp>
+      <p:sp>
+        <p:nvSpPr>
+          <p:cNvPr id="9" name="Tekstfelt 8">
+            <a:extLst>
+              <a:ext uri="{FF2B5EF4-FFF2-40B4-BE49-F238E27FC236}">
+                <a16:creationId xmlns:a16="http://schemas.microsoft.com/office/drawing/2014/main" id="{C8160F7D-158E-022F-AAB2-6DFE51006B83}"/>
+              </a:ext>
+            </a:extLst>
+          </p:cNvPr>
+          <p:cNvSpPr txBox="1"/>
+          <p:nvPr/>
+        </p:nvSpPr>
+        <p:spPr>
+          <a:xfrm>
+            <a:off x="664143" y="651994"/>
+            <a:ext cx="5774634" cy="461665"/>
+          </a:xfrm>
+          <a:prstGeom prst="rect">
+            <a:avLst/>
+          </a:prstGeom>
+          <a:noFill/>
+        </p:spPr>
+        <p:txBody>
+          <a:bodyPr wrap="square" rtlCol="0">
+            <a:spAutoFit/>
+          </a:bodyPr>
+          <a:lstStyle/>
+          <a:p>
+            <a:r>
+              <a:rPr lang="da-DK" sz="2400" b="1" dirty="0">
+                <a:solidFill>
+                  <a:schemeClr val="tx1">
+                    <a:lumMod val="85000"/>
+                    <a:lumOff val="15000"/>
+                  </a:schemeClr>
+                </a:solidFill>
+              </a:rPr>
+              <a:t>Systemskitse (kort gennemgang)</a:t>
+            </a:r>
+            <a:endParaRPr lang="es-ES" sz="2400" b="1" dirty="0">
+              <a:solidFill>
+                <a:schemeClr val="tx1">
+                  <a:lumMod val="85000"/>
+                  <a:lumOff val="15000"/>
+                </a:schemeClr>
+              </a:solidFill>
+            </a:endParaRPr>
+          </a:p>
+        </p:txBody>
+      </p:sp>
+      <p:cxnSp>
+        <p:nvCxnSpPr>
+          <p:cNvPr id="12" name="Lige forbindelse 11">
+            <a:extLst>
+              <a:ext uri="{FF2B5EF4-FFF2-40B4-BE49-F238E27FC236}">
+                <a16:creationId xmlns:a16="http://schemas.microsoft.com/office/drawing/2014/main" id="{AB005B2B-D63B-877C-CB0E-1BD8CF2BF53A}"/>
+              </a:ext>
+            </a:extLst>
+          </p:cNvPr>
+          <p:cNvCxnSpPr>
+            <a:cxnSpLocks/>
+          </p:cNvCxnSpPr>
+          <p:nvPr/>
+        </p:nvCxnSpPr>
+        <p:spPr>
+          <a:xfrm>
+            <a:off x="766946" y="1238183"/>
+            <a:ext cx="2928754" cy="0"/>
+          </a:xfrm>
+          <a:prstGeom prst="line">
+            <a:avLst/>
+          </a:prstGeom>
+          <a:ln w="28575" cap="flat" cmpd="sng" algn="ctr">
+            <a:solidFill>
+              <a:srgbClr val="344B38"/>
+            </a:solidFill>
+            <a:prstDash val="dash"/>
+            <a:round/>
+            <a:headEnd type="none" w="med" len="med"/>
+            <a:tailEnd type="none" w="med" len="med"/>
+          </a:ln>
+        </p:spPr>
+        <p:style>
+          <a:lnRef idx="0">
+            <a:scrgbClr r="0" g="0" b="0"/>
+          </a:lnRef>
+          <a:fillRef idx="0">
+            <a:scrgbClr r="0" g="0" b="0"/>
+          </a:fillRef>
+          <a:effectRef idx="0">
+            <a:scrgbClr r="0" g="0" b="0"/>
+          </a:effectRef>
+          <a:fontRef idx="minor">
+            <a:schemeClr val="tx1"/>
+          </a:fontRef>
+        </p:style>
+      </p:cxnSp>
+      <p:pic>
+        <p:nvPicPr>
+          <p:cNvPr id="4" name="Billede 3">
+            <a:extLst>
+              <a:ext uri="{FF2B5EF4-FFF2-40B4-BE49-F238E27FC236}">
                 <a16:creationId xmlns:a16="http://schemas.microsoft.com/office/drawing/2014/main" id="{0FCF51D6-0B84-61D4-DD27-3E2AB92388FC}"/>
               </a:ext>
             </a:extLst>
@@ -5958,7 +7943,7 @@
 </p:sld>
 </file>
 
-<file path=ppt/slides/slide7.xml><?xml version="1.0" encoding="utf-8"?>
+<file path=ppt/slides/slide9.xml><?xml version="1.0" encoding="utf-8"?>
 <p:sld xmlns:a="http://schemas.openxmlformats.org/drawingml/2006/main" xmlns:r="http://schemas.openxmlformats.org/officeDocument/2006/relationships" xmlns:p="http://schemas.openxmlformats.org/presentationml/2006/main">
   <p:cSld>
     <p:spTree>
@@ -6638,1565 +8623,6 @@
     <p:extLst>
       <p:ext uri="{BB962C8B-B14F-4D97-AF65-F5344CB8AC3E}">
         <p14:creationId xmlns:p14="http://schemas.microsoft.com/office/powerpoint/2010/main" val="3880298675"/>
-      </p:ext>
-    </p:extLst>
-  </p:cSld>
-  <p:clrMapOvr>
-    <a:masterClrMapping/>
-  </p:clrMapOvr>
-</p:sld>
-</file>
-
-<file path=ppt/slides/slide8.xml><?xml version="1.0" encoding="utf-8"?>
-<p:sld xmlns:a="http://schemas.openxmlformats.org/drawingml/2006/main" xmlns:r="http://schemas.openxmlformats.org/officeDocument/2006/relationships" xmlns:p="http://schemas.openxmlformats.org/presentationml/2006/main">
-  <p:cSld>
-    <p:spTree>
-      <p:nvGrpSpPr>
-        <p:cNvPr id="1" name="">
-          <a:extLst>
-            <a:ext uri="{FF2B5EF4-FFF2-40B4-BE49-F238E27FC236}">
-              <a16:creationId xmlns:a16="http://schemas.microsoft.com/office/drawing/2014/main" id="{D6F48729-A369-0986-2CCE-FF0F3720A7BF}"/>
-            </a:ext>
-          </a:extLst>
-        </p:cNvPr>
-        <p:cNvGrpSpPr/>
-        <p:nvPr/>
-      </p:nvGrpSpPr>
-      <p:grpSpPr>
-        <a:xfrm>
-          <a:off x="0" y="0"/>
-          <a:ext cx="0" cy="0"/>
-          <a:chOff x="0" y="0"/>
-          <a:chExt cx="0" cy="0"/>
-        </a:xfrm>
-      </p:grpSpPr>
-      <p:sp>
-        <p:nvSpPr>
-          <p:cNvPr id="7" name="Rektangel 6">
-            <a:extLst>
-              <a:ext uri="{FF2B5EF4-FFF2-40B4-BE49-F238E27FC236}">
-                <a16:creationId xmlns:a16="http://schemas.microsoft.com/office/drawing/2014/main" id="{AE0E5A89-B35F-9B4B-DB90-743D659721C9}"/>
-              </a:ext>
-            </a:extLst>
-          </p:cNvPr>
-          <p:cNvSpPr/>
-          <p:nvPr/>
-        </p:nvSpPr>
-        <p:spPr>
-          <a:xfrm>
-            <a:off x="145425" y="106610"/>
-            <a:ext cx="11910740" cy="6612242"/>
-          </a:xfrm>
-          <a:prstGeom prst="rect">
-            <a:avLst/>
-          </a:prstGeom>
-          <a:ln w="317500">
-            <a:solidFill>
-              <a:srgbClr val="344B38"/>
-            </a:solidFill>
-          </a:ln>
-        </p:spPr>
-        <p:style>
-          <a:lnRef idx="2">
-            <a:schemeClr val="accent3"/>
-          </a:lnRef>
-          <a:fillRef idx="1">
-            <a:schemeClr val="lt1"/>
-          </a:fillRef>
-          <a:effectRef idx="0">
-            <a:schemeClr val="accent3"/>
-          </a:effectRef>
-          <a:fontRef idx="minor">
-            <a:schemeClr val="dk1"/>
-          </a:fontRef>
-        </p:style>
-        <p:txBody>
-          <a:bodyPr rtlCol="0" anchor="ctr"/>
-          <a:lstStyle/>
-          <a:p>
-            <a:pPr algn="ctr"/>
-            <a:endParaRPr lang="es-ES"/>
-          </a:p>
-        </p:txBody>
-      </p:sp>
-      <p:sp>
-        <p:nvSpPr>
-          <p:cNvPr id="9" name="Tekstfelt 8">
-            <a:extLst>
-              <a:ext uri="{FF2B5EF4-FFF2-40B4-BE49-F238E27FC236}">
-                <a16:creationId xmlns:a16="http://schemas.microsoft.com/office/drawing/2014/main" id="{912FF84D-00F5-98DE-6DB9-7F55ED161065}"/>
-              </a:ext>
-            </a:extLst>
-          </p:cNvPr>
-          <p:cNvSpPr txBox="1"/>
-          <p:nvPr/>
-        </p:nvSpPr>
-        <p:spPr>
-          <a:xfrm>
-            <a:off x="664143" y="651994"/>
-            <a:ext cx="5774634" cy="461665"/>
-          </a:xfrm>
-          <a:prstGeom prst="rect">
-            <a:avLst/>
-          </a:prstGeom>
-          <a:noFill/>
-        </p:spPr>
-        <p:txBody>
-          <a:bodyPr wrap="square" rtlCol="0">
-            <a:spAutoFit/>
-          </a:bodyPr>
-          <a:lstStyle/>
-          <a:p>
-            <a:r>
-              <a:rPr lang="da-DK" sz="2400" b="1" dirty="0">
-                <a:solidFill>
-                  <a:schemeClr val="tx1">
-                    <a:lumMod val="85000"/>
-                    <a:lumOff val="15000"/>
-                  </a:schemeClr>
-                </a:solidFill>
-              </a:rPr>
-              <a:t>Undervisning, læring &amp; evaluering</a:t>
-            </a:r>
-            <a:endParaRPr lang="es-ES" sz="2400" b="1" dirty="0">
-              <a:solidFill>
-                <a:schemeClr val="tx1">
-                  <a:lumMod val="85000"/>
-                  <a:lumOff val="15000"/>
-                </a:schemeClr>
-              </a:solidFill>
-            </a:endParaRPr>
-          </a:p>
-        </p:txBody>
-      </p:sp>
-      <p:cxnSp>
-        <p:nvCxnSpPr>
-          <p:cNvPr id="12" name="Lige forbindelse 11">
-            <a:extLst>
-              <a:ext uri="{FF2B5EF4-FFF2-40B4-BE49-F238E27FC236}">
-                <a16:creationId xmlns:a16="http://schemas.microsoft.com/office/drawing/2014/main" id="{64A51F5A-C057-7509-1698-C20815A584BF}"/>
-              </a:ext>
-            </a:extLst>
-          </p:cNvPr>
-          <p:cNvCxnSpPr>
-            <a:cxnSpLocks/>
-          </p:cNvCxnSpPr>
-          <p:nvPr/>
-        </p:nvCxnSpPr>
-        <p:spPr>
-          <a:xfrm>
-            <a:off x="766946" y="1238183"/>
-            <a:ext cx="2928754" cy="0"/>
-          </a:xfrm>
-          <a:prstGeom prst="line">
-            <a:avLst/>
-          </a:prstGeom>
-          <a:ln w="28575" cap="flat" cmpd="sng" algn="ctr">
-            <a:solidFill>
-              <a:srgbClr val="344B38"/>
-            </a:solidFill>
-            <a:prstDash val="dash"/>
-            <a:round/>
-            <a:headEnd type="none" w="med" len="med"/>
-            <a:tailEnd type="none" w="med" len="med"/>
-          </a:ln>
-        </p:spPr>
-        <p:style>
-          <a:lnRef idx="0">
-            <a:scrgbClr r="0" g="0" b="0"/>
-          </a:lnRef>
-          <a:fillRef idx="0">
-            <a:scrgbClr r="0" g="0" b="0"/>
-          </a:fillRef>
-          <a:effectRef idx="0">
-            <a:scrgbClr r="0" g="0" b="0"/>
-          </a:effectRef>
-          <a:fontRef idx="minor">
-            <a:schemeClr val="tx1"/>
-          </a:fontRef>
-        </p:style>
-      </p:cxnSp>
-      <p:sp>
-        <p:nvSpPr>
-          <p:cNvPr id="6" name="Tekstfelt 5">
-            <a:extLst>
-              <a:ext uri="{FF2B5EF4-FFF2-40B4-BE49-F238E27FC236}">
-                <a16:creationId xmlns:a16="http://schemas.microsoft.com/office/drawing/2014/main" id="{F749F099-23BD-7456-58C8-A9B578743DDB}"/>
-              </a:ext>
-            </a:extLst>
-          </p:cNvPr>
-          <p:cNvSpPr txBox="1"/>
-          <p:nvPr/>
-        </p:nvSpPr>
-        <p:spPr>
-          <a:xfrm>
-            <a:off x="664143" y="1659043"/>
-            <a:ext cx="1212783" cy="1754326"/>
-          </a:xfrm>
-          <a:prstGeom prst="rect">
-            <a:avLst/>
-          </a:prstGeom>
-          <a:noFill/>
-        </p:spPr>
-        <p:txBody>
-          <a:bodyPr wrap="square" rtlCol="0">
-            <a:spAutoFit/>
-          </a:bodyPr>
-          <a:lstStyle/>
-          <a:p>
-            <a:r>
-              <a:rPr lang="da-DK" b="1" dirty="0">
-                <a:solidFill>
-                  <a:schemeClr val="tx1">
-                    <a:lumMod val="85000"/>
-                    <a:lumOff val="15000"/>
-                  </a:schemeClr>
-                </a:solidFill>
-              </a:rPr>
-              <a:t>Godt</a:t>
-            </a:r>
-          </a:p>
-          <a:p>
-            <a:endParaRPr lang="da-DK" dirty="0">
-              <a:solidFill>
-                <a:schemeClr val="tx1">
-                  <a:lumMod val="85000"/>
-                  <a:lumOff val="15000"/>
-                </a:schemeClr>
-              </a:solidFill>
-            </a:endParaRPr>
-          </a:p>
-          <a:p>
-            <a:endParaRPr lang="da-DK" dirty="0">
-              <a:solidFill>
-                <a:schemeClr val="tx1">
-                  <a:lumMod val="85000"/>
-                  <a:lumOff val="15000"/>
-                </a:schemeClr>
-              </a:solidFill>
-            </a:endParaRPr>
-          </a:p>
-          <a:p>
-            <a:endParaRPr lang="da-DK" dirty="0">
-              <a:solidFill>
-                <a:schemeClr val="tx1">
-                  <a:lumMod val="85000"/>
-                  <a:lumOff val="15000"/>
-                </a:schemeClr>
-              </a:solidFill>
-            </a:endParaRPr>
-          </a:p>
-          <a:p>
-            <a:endParaRPr lang="da-DK" dirty="0">
-              <a:solidFill>
-                <a:schemeClr val="tx1">
-                  <a:lumMod val="85000"/>
-                  <a:lumOff val="15000"/>
-                </a:schemeClr>
-              </a:solidFill>
-            </a:endParaRPr>
-          </a:p>
-          <a:p>
-            <a:endParaRPr lang="es-ES" dirty="0">
-              <a:solidFill>
-                <a:schemeClr val="tx1">
-                  <a:lumMod val="85000"/>
-                  <a:lumOff val="15000"/>
-                </a:schemeClr>
-              </a:solidFill>
-            </a:endParaRPr>
-          </a:p>
-        </p:txBody>
-      </p:sp>
-      <p:sp>
-        <p:nvSpPr>
-          <p:cNvPr id="3" name="Tekstfelt 2">
-            <a:extLst>
-              <a:ext uri="{FF2B5EF4-FFF2-40B4-BE49-F238E27FC236}">
-                <a16:creationId xmlns:a16="http://schemas.microsoft.com/office/drawing/2014/main" id="{95184FE5-D36E-DAC0-517A-E62667E6B63C}"/>
-              </a:ext>
-            </a:extLst>
-          </p:cNvPr>
-          <p:cNvSpPr txBox="1"/>
-          <p:nvPr/>
-        </p:nvSpPr>
-        <p:spPr>
-          <a:xfrm>
-            <a:off x="664141" y="2079902"/>
-            <a:ext cx="4995513" cy="3139321"/>
-          </a:xfrm>
-          <a:prstGeom prst="rect">
-            <a:avLst/>
-          </a:prstGeom>
-          <a:noFill/>
-        </p:spPr>
-        <p:txBody>
-          <a:bodyPr wrap="square" rtlCol="0">
-            <a:spAutoFit/>
-          </a:bodyPr>
-          <a:lstStyle/>
-          <a:p>
-            <a:pPr marL="285750" indent="-285750">
-              <a:buFont typeface="Arial" panose="020B0604020202020204" pitchFamily="34" charset="0"/>
-              <a:buChar char="•"/>
-            </a:pPr>
-            <a:r>
-              <a:rPr lang="da-DK" dirty="0">
-                <a:solidFill>
-                  <a:schemeClr val="tx1">
-                    <a:lumMod val="85000"/>
-                    <a:lumOff val="15000"/>
-                  </a:schemeClr>
-                </a:solidFill>
-              </a:rPr>
-              <a:t>Mulighed for eget projekt</a:t>
-            </a:r>
-          </a:p>
-          <a:p>
-            <a:pPr marL="285750" indent="-285750">
-              <a:buFont typeface="Arial" panose="020B0604020202020204" pitchFamily="34" charset="0"/>
-              <a:buChar char="•"/>
-            </a:pPr>
-            <a:r>
-              <a:rPr lang="da-DK" dirty="0">
-                <a:solidFill>
-                  <a:schemeClr val="tx1">
-                    <a:lumMod val="85000"/>
-                    <a:lumOff val="15000"/>
-                  </a:schemeClr>
-                </a:solidFill>
-              </a:rPr>
-              <a:t>Læring om AIDA</a:t>
-            </a:r>
-          </a:p>
-          <a:p>
-            <a:pPr marL="285750" indent="-285750">
-              <a:buFont typeface="Arial" panose="020B0604020202020204" pitchFamily="34" charset="0"/>
-              <a:buChar char="•"/>
-            </a:pPr>
-            <a:r>
-              <a:rPr lang="da-DK" dirty="0">
-                <a:solidFill>
-                  <a:schemeClr val="tx1">
-                    <a:lumMod val="85000"/>
-                    <a:lumOff val="15000"/>
-                  </a:schemeClr>
-                </a:solidFill>
-              </a:rPr>
-              <a:t>Modstand blev til effektivisering</a:t>
-            </a:r>
-          </a:p>
-          <a:p>
-            <a:pPr marL="285750" indent="-285750">
-              <a:buFont typeface="Arial" panose="020B0604020202020204" pitchFamily="34" charset="0"/>
-              <a:buChar char="•"/>
-            </a:pPr>
-            <a:r>
-              <a:rPr lang="da-DK" dirty="0">
-                <a:solidFill>
-                  <a:schemeClr val="tx1">
-                    <a:lumMod val="85000"/>
-                    <a:lumOff val="15000"/>
-                  </a:schemeClr>
-                </a:solidFill>
-              </a:rPr>
-              <a:t>Anderledes brug af </a:t>
-            </a:r>
-            <a:r>
-              <a:rPr lang="da-DK" dirty="0" err="1">
-                <a:solidFill>
-                  <a:schemeClr val="tx1">
-                    <a:lumMod val="85000"/>
-                    <a:lumOff val="15000"/>
-                  </a:schemeClr>
-                </a:solidFill>
-              </a:rPr>
-              <a:t>skills</a:t>
-            </a:r>
-            <a:r>
-              <a:rPr lang="da-DK" dirty="0">
-                <a:solidFill>
-                  <a:schemeClr val="tx1">
-                    <a:lumMod val="85000"/>
-                    <a:lumOff val="15000"/>
-                  </a:schemeClr>
-                </a:solidFill>
-              </a:rPr>
-              <a:t>/</a:t>
-            </a:r>
-          </a:p>
-          <a:p>
-            <a:pPr marL="285750" indent="-285750">
-              <a:buFont typeface="Arial" panose="020B0604020202020204" pitchFamily="34" charset="0"/>
-              <a:buChar char="•"/>
-            </a:pPr>
-            <a:r>
-              <a:rPr lang="da-DK" dirty="0">
-                <a:solidFill>
-                  <a:schemeClr val="tx1">
-                    <a:lumMod val="85000"/>
-                    <a:lumOff val="15000"/>
-                  </a:schemeClr>
-                </a:solidFill>
-              </a:rPr>
-              <a:t>Reel virksomhed</a:t>
-            </a:r>
-          </a:p>
-          <a:p>
-            <a:pPr marL="285750" indent="-285750">
-              <a:buFont typeface="Arial" panose="020B0604020202020204" pitchFamily="34" charset="0"/>
-              <a:buChar char="•"/>
-            </a:pPr>
-            <a:r>
-              <a:rPr lang="da-DK" dirty="0">
-                <a:solidFill>
-                  <a:schemeClr val="tx1">
-                    <a:lumMod val="85000"/>
-                    <a:lumOff val="15000"/>
-                  </a:schemeClr>
-                </a:solidFill>
-              </a:rPr>
-              <a:t>Reelt projekt &amp; løsning</a:t>
-            </a:r>
-          </a:p>
-          <a:p>
-            <a:endParaRPr lang="da-DK" dirty="0">
-              <a:solidFill>
-                <a:schemeClr val="tx1">
-                  <a:lumMod val="85000"/>
-                  <a:lumOff val="15000"/>
-                </a:schemeClr>
-              </a:solidFill>
-            </a:endParaRPr>
-          </a:p>
-          <a:p>
-            <a:endParaRPr lang="da-DK" dirty="0">
-              <a:solidFill>
-                <a:schemeClr val="tx1">
-                  <a:lumMod val="85000"/>
-                  <a:lumOff val="15000"/>
-                </a:schemeClr>
-              </a:solidFill>
-            </a:endParaRPr>
-          </a:p>
-          <a:p>
-            <a:endParaRPr lang="da-DK" dirty="0">
-              <a:solidFill>
-                <a:schemeClr val="tx1">
-                  <a:lumMod val="85000"/>
-                  <a:lumOff val="15000"/>
-                </a:schemeClr>
-              </a:solidFill>
-            </a:endParaRPr>
-          </a:p>
-          <a:p>
-            <a:endParaRPr lang="da-DK" dirty="0">
-              <a:solidFill>
-                <a:schemeClr val="tx1">
-                  <a:lumMod val="85000"/>
-                  <a:lumOff val="15000"/>
-                </a:schemeClr>
-              </a:solidFill>
-            </a:endParaRPr>
-          </a:p>
-          <a:p>
-            <a:endParaRPr lang="es-ES" dirty="0">
-              <a:solidFill>
-                <a:schemeClr val="tx1">
-                  <a:lumMod val="85000"/>
-                  <a:lumOff val="15000"/>
-                </a:schemeClr>
-              </a:solidFill>
-            </a:endParaRPr>
-          </a:p>
-        </p:txBody>
-      </p:sp>
-      <p:sp>
-        <p:nvSpPr>
-          <p:cNvPr id="8" name="Tekstfelt 7">
-            <a:extLst>
-              <a:ext uri="{FF2B5EF4-FFF2-40B4-BE49-F238E27FC236}">
-                <a16:creationId xmlns:a16="http://schemas.microsoft.com/office/drawing/2014/main" id="{E0B0304C-791C-EF8F-192C-2E596F92DC74}"/>
-              </a:ext>
-            </a:extLst>
-          </p:cNvPr>
-          <p:cNvSpPr txBox="1"/>
-          <p:nvPr/>
-        </p:nvSpPr>
-        <p:spPr>
-          <a:xfrm>
-            <a:off x="6378060" y="1658405"/>
-            <a:ext cx="1212783" cy="1754326"/>
-          </a:xfrm>
-          <a:prstGeom prst="rect">
-            <a:avLst/>
-          </a:prstGeom>
-          <a:noFill/>
-        </p:spPr>
-        <p:txBody>
-          <a:bodyPr wrap="square" rtlCol="0">
-            <a:spAutoFit/>
-          </a:bodyPr>
-          <a:lstStyle/>
-          <a:p>
-            <a:r>
-              <a:rPr lang="da-DK" b="1" dirty="0">
-                <a:solidFill>
-                  <a:schemeClr val="tx1">
-                    <a:lumMod val="85000"/>
-                    <a:lumOff val="15000"/>
-                  </a:schemeClr>
-                </a:solidFill>
-              </a:rPr>
-              <a:t>Dårligt</a:t>
-            </a:r>
-          </a:p>
-          <a:p>
-            <a:endParaRPr lang="da-DK" dirty="0">
-              <a:solidFill>
-                <a:schemeClr val="tx1">
-                  <a:lumMod val="85000"/>
-                  <a:lumOff val="15000"/>
-                </a:schemeClr>
-              </a:solidFill>
-            </a:endParaRPr>
-          </a:p>
-          <a:p>
-            <a:endParaRPr lang="da-DK" dirty="0">
-              <a:solidFill>
-                <a:schemeClr val="tx1">
-                  <a:lumMod val="85000"/>
-                  <a:lumOff val="15000"/>
-                </a:schemeClr>
-              </a:solidFill>
-            </a:endParaRPr>
-          </a:p>
-          <a:p>
-            <a:endParaRPr lang="da-DK" dirty="0">
-              <a:solidFill>
-                <a:schemeClr val="tx1">
-                  <a:lumMod val="85000"/>
-                  <a:lumOff val="15000"/>
-                </a:schemeClr>
-              </a:solidFill>
-            </a:endParaRPr>
-          </a:p>
-          <a:p>
-            <a:endParaRPr lang="da-DK" dirty="0">
-              <a:solidFill>
-                <a:schemeClr val="tx1">
-                  <a:lumMod val="85000"/>
-                  <a:lumOff val="15000"/>
-                </a:schemeClr>
-              </a:solidFill>
-            </a:endParaRPr>
-          </a:p>
-          <a:p>
-            <a:endParaRPr lang="es-ES" dirty="0">
-              <a:solidFill>
-                <a:schemeClr val="tx1">
-                  <a:lumMod val="85000"/>
-                  <a:lumOff val="15000"/>
-                </a:schemeClr>
-              </a:solidFill>
-            </a:endParaRPr>
-          </a:p>
-        </p:txBody>
-      </p:sp>
-      <p:sp>
-        <p:nvSpPr>
-          <p:cNvPr id="14" name="Tekstfelt 13">
-            <a:extLst>
-              <a:ext uri="{FF2B5EF4-FFF2-40B4-BE49-F238E27FC236}">
-                <a16:creationId xmlns:a16="http://schemas.microsoft.com/office/drawing/2014/main" id="{14AD9715-B94C-1DE0-5212-DDCFF9AE5029}"/>
-              </a:ext>
-            </a:extLst>
-          </p:cNvPr>
-          <p:cNvSpPr txBox="1"/>
-          <p:nvPr/>
-        </p:nvSpPr>
-        <p:spPr>
-          <a:xfrm>
-            <a:off x="6360153" y="2079902"/>
-            <a:ext cx="4995513" cy="2862322"/>
-          </a:xfrm>
-          <a:prstGeom prst="rect">
-            <a:avLst/>
-          </a:prstGeom>
-          <a:noFill/>
-        </p:spPr>
-        <p:txBody>
-          <a:bodyPr wrap="square" rtlCol="0">
-            <a:spAutoFit/>
-          </a:bodyPr>
-          <a:lstStyle/>
-          <a:p>
-            <a:pPr marL="285750" indent="-285750">
-              <a:buFont typeface="Arial" panose="020B0604020202020204" pitchFamily="34" charset="0"/>
-              <a:buChar char="•"/>
-            </a:pPr>
-            <a:r>
-              <a:rPr lang="da-DK" dirty="0">
-                <a:solidFill>
-                  <a:schemeClr val="tx1">
-                    <a:lumMod val="85000"/>
-                    <a:lumOff val="15000"/>
-                  </a:schemeClr>
-                </a:solidFill>
-              </a:rPr>
-              <a:t>Moodle + Kursusmaterialer</a:t>
-            </a:r>
-          </a:p>
-          <a:p>
-            <a:pPr marL="285750" indent="-285750">
-              <a:buFont typeface="Arial" panose="020B0604020202020204" pitchFamily="34" charset="0"/>
-              <a:buChar char="•"/>
-            </a:pPr>
-            <a:r>
-              <a:rPr lang="da-DK" dirty="0">
-                <a:solidFill>
-                  <a:schemeClr val="tx1">
-                    <a:lumMod val="85000"/>
-                    <a:lumOff val="15000"/>
-                  </a:schemeClr>
-                </a:solidFill>
-              </a:rPr>
-              <a:t>Motivation</a:t>
-            </a:r>
-          </a:p>
-          <a:p>
-            <a:pPr marL="285750" indent="-285750">
-              <a:buFont typeface="Arial" panose="020B0604020202020204" pitchFamily="34" charset="0"/>
-              <a:buChar char="•"/>
-            </a:pPr>
-            <a:r>
-              <a:rPr lang="da-DK" dirty="0">
-                <a:solidFill>
-                  <a:schemeClr val="tx1">
-                    <a:lumMod val="85000"/>
-                    <a:lumOff val="15000"/>
-                  </a:schemeClr>
-                </a:solidFill>
-              </a:rPr>
-              <a:t>Privatliv</a:t>
-            </a:r>
-          </a:p>
-          <a:p>
-            <a:pPr marL="285750" indent="-285750">
-              <a:buFont typeface="Arial" panose="020B0604020202020204" pitchFamily="34" charset="0"/>
-              <a:buChar char="•"/>
-            </a:pPr>
-            <a:r>
-              <a:rPr lang="da-DK" dirty="0">
-                <a:solidFill>
-                  <a:schemeClr val="tx1">
-                    <a:lumMod val="85000"/>
-                    <a:lumOff val="15000"/>
-                  </a:schemeClr>
-                </a:solidFill>
-              </a:rPr>
-              <a:t>1-mandsgruppe</a:t>
-            </a:r>
-          </a:p>
-          <a:p>
-            <a:pPr marL="285750" indent="-285750">
-              <a:buFont typeface="Arial" panose="020B0604020202020204" pitchFamily="34" charset="0"/>
-              <a:buChar char="•"/>
-            </a:pPr>
-            <a:r>
-              <a:rPr lang="da-DK" dirty="0">
-                <a:solidFill>
-                  <a:schemeClr val="tx1">
-                    <a:lumMod val="85000"/>
-                    <a:lumOff val="15000"/>
-                  </a:schemeClr>
-                </a:solidFill>
-              </a:rPr>
-              <a:t>Systemudvikling</a:t>
-            </a:r>
-          </a:p>
-          <a:p>
-            <a:pPr marL="285750" indent="-285750">
-              <a:buFont typeface="Arial" panose="020B0604020202020204" pitchFamily="34" charset="0"/>
-              <a:buChar char="•"/>
-            </a:pPr>
-            <a:r>
-              <a:rPr lang="da-DK" dirty="0">
-                <a:solidFill>
-                  <a:schemeClr val="tx1">
-                    <a:lumMod val="85000"/>
-                    <a:lumOff val="15000"/>
-                  </a:schemeClr>
-                </a:solidFill>
-              </a:rPr>
-              <a:t>Blogposts</a:t>
-            </a:r>
-          </a:p>
-          <a:p>
-            <a:pPr marL="285750" indent="-285750">
-              <a:buFont typeface="Arial" panose="020B0604020202020204" pitchFamily="34" charset="0"/>
-              <a:buChar char="•"/>
-            </a:pPr>
-            <a:r>
-              <a:rPr lang="da-DK" dirty="0">
-                <a:solidFill>
-                  <a:schemeClr val="tx1">
-                    <a:lumMod val="85000"/>
-                    <a:lumOff val="15000"/>
-                  </a:schemeClr>
-                </a:solidFill>
-              </a:rPr>
-              <a:t>Brug af AI (personlig holdning)</a:t>
-            </a:r>
-          </a:p>
-          <a:p>
-            <a:pPr marL="285750" indent="-285750">
-              <a:buFont typeface="Arial" panose="020B0604020202020204" pitchFamily="34" charset="0"/>
-              <a:buChar char="•"/>
-            </a:pPr>
-            <a:r>
-              <a:rPr lang="da-DK" dirty="0">
-                <a:solidFill>
-                  <a:schemeClr val="tx1">
-                    <a:lumMod val="85000"/>
-                    <a:lumOff val="15000"/>
-                  </a:schemeClr>
-                </a:solidFill>
-              </a:rPr>
-              <a:t>Manglende info til folk der ikke benytter Discord / Kursusmaterialer</a:t>
-            </a:r>
-          </a:p>
-          <a:p>
-            <a:pPr marL="285750" indent="-285750">
-              <a:buFont typeface="Arial" panose="020B0604020202020204" pitchFamily="34" charset="0"/>
-              <a:buChar char="•"/>
-            </a:pPr>
-            <a:r>
-              <a:rPr lang="da-DK" dirty="0">
-                <a:solidFill>
-                  <a:schemeClr val="tx1">
-                    <a:lumMod val="85000"/>
-                    <a:lumOff val="15000"/>
-                  </a:schemeClr>
-                </a:solidFill>
-              </a:rPr>
-              <a:t>Klassen på 4. Semester</a:t>
-            </a:r>
-          </a:p>
-        </p:txBody>
-      </p:sp>
-      <p:pic>
-        <p:nvPicPr>
-          <p:cNvPr id="18" name="Billede 17">
-            <a:extLst>
-              <a:ext uri="{FF2B5EF4-FFF2-40B4-BE49-F238E27FC236}">
-                <a16:creationId xmlns:a16="http://schemas.microsoft.com/office/drawing/2014/main" id="{20489389-AE7D-66E8-BB75-7869DB0B405B}"/>
-              </a:ext>
-            </a:extLst>
-          </p:cNvPr>
-          <p:cNvPicPr>
-            <a:picLocks noChangeAspect="1"/>
-          </p:cNvPicPr>
-          <p:nvPr/>
-        </p:nvPicPr>
-        <p:blipFill>
-          <a:blip r:embed="rId2"/>
-          <a:stretch>
-            <a:fillRect/>
-          </a:stretch>
-        </p:blipFill>
-        <p:spPr>
-          <a:xfrm>
-            <a:off x="1270534" y="3979293"/>
-            <a:ext cx="4358489" cy="2226713"/>
-          </a:xfrm>
-          <a:prstGeom prst="rect">
-            <a:avLst/>
-          </a:prstGeom>
-        </p:spPr>
-      </p:pic>
-    </p:spTree>
-    <p:extLst>
-      <p:ext uri="{BB962C8B-B14F-4D97-AF65-F5344CB8AC3E}">
-        <p14:creationId xmlns:p14="http://schemas.microsoft.com/office/powerpoint/2010/main" val="1386711761"/>
-      </p:ext>
-    </p:extLst>
-  </p:cSld>
-  <p:clrMapOvr>
-    <a:masterClrMapping/>
-  </p:clrMapOvr>
-</p:sld>
-</file>
-
-<file path=ppt/slides/slide9.xml><?xml version="1.0" encoding="utf-8"?>
-<p:sld xmlns:a="http://schemas.openxmlformats.org/drawingml/2006/main" xmlns:r="http://schemas.openxmlformats.org/officeDocument/2006/relationships" xmlns:p="http://schemas.openxmlformats.org/presentationml/2006/main">
-  <p:cSld>
-    <p:spTree>
-      <p:nvGrpSpPr>
-        <p:cNvPr id="1" name="">
-          <a:extLst>
-            <a:ext uri="{FF2B5EF4-FFF2-40B4-BE49-F238E27FC236}">
-              <a16:creationId xmlns:a16="http://schemas.microsoft.com/office/drawing/2014/main" id="{AE864D1A-AE31-D000-B9A3-8F5341C16DA5}"/>
-            </a:ext>
-          </a:extLst>
-        </p:cNvPr>
-        <p:cNvGrpSpPr/>
-        <p:nvPr/>
-      </p:nvGrpSpPr>
-      <p:grpSpPr>
-        <a:xfrm>
-          <a:off x="0" y="0"/>
-          <a:ext cx="0" cy="0"/>
-          <a:chOff x="0" y="0"/>
-          <a:chExt cx="0" cy="0"/>
-        </a:xfrm>
-      </p:grpSpPr>
-      <p:sp>
-        <p:nvSpPr>
-          <p:cNvPr id="7" name="Rektangel 6">
-            <a:extLst>
-              <a:ext uri="{FF2B5EF4-FFF2-40B4-BE49-F238E27FC236}">
-                <a16:creationId xmlns:a16="http://schemas.microsoft.com/office/drawing/2014/main" id="{5685FE34-4EBC-E679-9240-706BAEF0EBC0}"/>
-              </a:ext>
-            </a:extLst>
-          </p:cNvPr>
-          <p:cNvSpPr/>
-          <p:nvPr/>
-        </p:nvSpPr>
-        <p:spPr>
-          <a:xfrm>
-            <a:off x="145425" y="106610"/>
-            <a:ext cx="11910740" cy="6612242"/>
-          </a:xfrm>
-          <a:prstGeom prst="rect">
-            <a:avLst/>
-          </a:prstGeom>
-          <a:ln w="317500">
-            <a:solidFill>
-              <a:srgbClr val="344B38"/>
-            </a:solidFill>
-          </a:ln>
-        </p:spPr>
-        <p:style>
-          <a:lnRef idx="2">
-            <a:schemeClr val="accent3"/>
-          </a:lnRef>
-          <a:fillRef idx="1">
-            <a:schemeClr val="lt1"/>
-          </a:fillRef>
-          <a:effectRef idx="0">
-            <a:schemeClr val="accent3"/>
-          </a:effectRef>
-          <a:fontRef idx="minor">
-            <a:schemeClr val="dk1"/>
-          </a:fontRef>
-        </p:style>
-        <p:txBody>
-          <a:bodyPr rtlCol="0" anchor="ctr"/>
-          <a:lstStyle/>
-          <a:p>
-            <a:pPr algn="ctr"/>
-            <a:endParaRPr lang="es-ES"/>
-          </a:p>
-        </p:txBody>
-      </p:sp>
-      <p:sp>
-        <p:nvSpPr>
-          <p:cNvPr id="9" name="Tekstfelt 8">
-            <a:extLst>
-              <a:ext uri="{FF2B5EF4-FFF2-40B4-BE49-F238E27FC236}">
-                <a16:creationId xmlns:a16="http://schemas.microsoft.com/office/drawing/2014/main" id="{480F5195-5759-704F-8B37-6F68112FB2EA}"/>
-              </a:ext>
-            </a:extLst>
-          </p:cNvPr>
-          <p:cNvSpPr txBox="1"/>
-          <p:nvPr/>
-        </p:nvSpPr>
-        <p:spPr>
-          <a:xfrm>
-            <a:off x="664143" y="651994"/>
-            <a:ext cx="5774634" cy="461665"/>
-          </a:xfrm>
-          <a:prstGeom prst="rect">
-            <a:avLst/>
-          </a:prstGeom>
-          <a:noFill/>
-        </p:spPr>
-        <p:txBody>
-          <a:bodyPr wrap="square" rtlCol="0">
-            <a:spAutoFit/>
-          </a:bodyPr>
-          <a:lstStyle/>
-          <a:p>
-            <a:r>
-              <a:rPr lang="da-DK" sz="2400" b="1" dirty="0">
-                <a:solidFill>
-                  <a:schemeClr val="tx1">
-                    <a:lumMod val="85000"/>
-                    <a:lumOff val="15000"/>
-                  </a:schemeClr>
-                </a:solidFill>
-              </a:rPr>
-              <a:t>Fremtid for Engestofte &amp; mig selv</a:t>
-            </a:r>
-            <a:endParaRPr lang="es-ES" sz="2400" b="1" dirty="0">
-              <a:solidFill>
-                <a:schemeClr val="tx1">
-                  <a:lumMod val="85000"/>
-                  <a:lumOff val="15000"/>
-                </a:schemeClr>
-              </a:solidFill>
-            </a:endParaRPr>
-          </a:p>
-        </p:txBody>
-      </p:sp>
-      <p:cxnSp>
-        <p:nvCxnSpPr>
-          <p:cNvPr id="12" name="Lige forbindelse 11">
-            <a:extLst>
-              <a:ext uri="{FF2B5EF4-FFF2-40B4-BE49-F238E27FC236}">
-                <a16:creationId xmlns:a16="http://schemas.microsoft.com/office/drawing/2014/main" id="{E6232E16-0443-BA25-4451-4FC65D18DE9C}"/>
-              </a:ext>
-            </a:extLst>
-          </p:cNvPr>
-          <p:cNvCxnSpPr>
-            <a:cxnSpLocks/>
-          </p:cNvCxnSpPr>
-          <p:nvPr/>
-        </p:nvCxnSpPr>
-        <p:spPr>
-          <a:xfrm>
-            <a:off x="766946" y="1238183"/>
-            <a:ext cx="2928754" cy="0"/>
-          </a:xfrm>
-          <a:prstGeom prst="line">
-            <a:avLst/>
-          </a:prstGeom>
-          <a:ln w="28575" cap="flat" cmpd="sng" algn="ctr">
-            <a:solidFill>
-              <a:srgbClr val="344B38"/>
-            </a:solidFill>
-            <a:prstDash val="dash"/>
-            <a:round/>
-            <a:headEnd type="none" w="med" len="med"/>
-            <a:tailEnd type="none" w="med" len="med"/>
-          </a:ln>
-        </p:spPr>
-        <p:style>
-          <a:lnRef idx="0">
-            <a:scrgbClr r="0" g="0" b="0"/>
-          </a:lnRef>
-          <a:fillRef idx="0">
-            <a:scrgbClr r="0" g="0" b="0"/>
-          </a:fillRef>
-          <a:effectRef idx="0">
-            <a:scrgbClr r="0" g="0" b="0"/>
-          </a:effectRef>
-          <a:fontRef idx="minor">
-            <a:schemeClr val="tx1"/>
-          </a:fontRef>
-        </p:style>
-      </p:cxnSp>
-      <p:sp>
-        <p:nvSpPr>
-          <p:cNvPr id="6" name="Tekstfelt 5">
-            <a:extLst>
-              <a:ext uri="{FF2B5EF4-FFF2-40B4-BE49-F238E27FC236}">
-                <a16:creationId xmlns:a16="http://schemas.microsoft.com/office/drawing/2014/main" id="{954E8337-FDDE-AD61-CCA0-5B2CDC646507}"/>
-              </a:ext>
-            </a:extLst>
-          </p:cNvPr>
-          <p:cNvSpPr txBox="1"/>
-          <p:nvPr/>
-        </p:nvSpPr>
-        <p:spPr>
-          <a:xfrm>
-            <a:off x="664143" y="1659043"/>
-            <a:ext cx="2560320" cy="1754326"/>
-          </a:xfrm>
-          <a:prstGeom prst="rect">
-            <a:avLst/>
-          </a:prstGeom>
-          <a:noFill/>
-        </p:spPr>
-        <p:txBody>
-          <a:bodyPr wrap="square" rtlCol="0">
-            <a:spAutoFit/>
-          </a:bodyPr>
-          <a:lstStyle/>
-          <a:p>
-            <a:r>
-              <a:rPr lang="da-DK" b="1" dirty="0">
-                <a:solidFill>
-                  <a:schemeClr val="tx1">
-                    <a:lumMod val="85000"/>
-                    <a:lumOff val="15000"/>
-                  </a:schemeClr>
-                </a:solidFill>
-              </a:rPr>
-              <a:t>Engestofte Gods</a:t>
-            </a:r>
-          </a:p>
-          <a:p>
-            <a:endParaRPr lang="da-DK" dirty="0">
-              <a:solidFill>
-                <a:schemeClr val="tx1">
-                  <a:lumMod val="85000"/>
-                  <a:lumOff val="15000"/>
-                </a:schemeClr>
-              </a:solidFill>
-            </a:endParaRPr>
-          </a:p>
-          <a:p>
-            <a:endParaRPr lang="da-DK" dirty="0">
-              <a:solidFill>
-                <a:schemeClr val="tx1">
-                  <a:lumMod val="85000"/>
-                  <a:lumOff val="15000"/>
-                </a:schemeClr>
-              </a:solidFill>
-            </a:endParaRPr>
-          </a:p>
-          <a:p>
-            <a:endParaRPr lang="da-DK" dirty="0">
-              <a:solidFill>
-                <a:schemeClr val="tx1">
-                  <a:lumMod val="85000"/>
-                  <a:lumOff val="15000"/>
-                </a:schemeClr>
-              </a:solidFill>
-            </a:endParaRPr>
-          </a:p>
-          <a:p>
-            <a:endParaRPr lang="da-DK" dirty="0">
-              <a:solidFill>
-                <a:schemeClr val="tx1">
-                  <a:lumMod val="85000"/>
-                  <a:lumOff val="15000"/>
-                </a:schemeClr>
-              </a:solidFill>
-            </a:endParaRPr>
-          </a:p>
-          <a:p>
-            <a:endParaRPr lang="es-ES" dirty="0">
-              <a:solidFill>
-                <a:schemeClr val="tx1">
-                  <a:lumMod val="85000"/>
-                  <a:lumOff val="15000"/>
-                </a:schemeClr>
-              </a:solidFill>
-            </a:endParaRPr>
-          </a:p>
-        </p:txBody>
-      </p:sp>
-      <p:sp>
-        <p:nvSpPr>
-          <p:cNvPr id="3" name="Tekstfelt 2">
-            <a:extLst>
-              <a:ext uri="{FF2B5EF4-FFF2-40B4-BE49-F238E27FC236}">
-                <a16:creationId xmlns:a16="http://schemas.microsoft.com/office/drawing/2014/main" id="{87CAAD0D-3B53-2D9E-A140-F7A8A078D4D5}"/>
-              </a:ext>
-            </a:extLst>
-          </p:cNvPr>
-          <p:cNvSpPr txBox="1"/>
-          <p:nvPr/>
-        </p:nvSpPr>
-        <p:spPr>
-          <a:xfrm>
-            <a:off x="664141" y="2079902"/>
-            <a:ext cx="4995513" cy="3693319"/>
-          </a:xfrm>
-          <a:prstGeom prst="rect">
-            <a:avLst/>
-          </a:prstGeom>
-          <a:noFill/>
-        </p:spPr>
-        <p:txBody>
-          <a:bodyPr wrap="square" rtlCol="0">
-            <a:spAutoFit/>
-          </a:bodyPr>
-          <a:lstStyle/>
-          <a:p>
-            <a:pPr marL="285750" indent="-285750">
-              <a:buFont typeface="Arial" panose="020B0604020202020204" pitchFamily="34" charset="0"/>
-              <a:buChar char="•"/>
-            </a:pPr>
-            <a:r>
-              <a:rPr lang="da-DK" dirty="0">
-                <a:solidFill>
-                  <a:schemeClr val="tx1">
-                    <a:lumMod val="85000"/>
-                    <a:lumOff val="15000"/>
-                  </a:schemeClr>
-                </a:solidFill>
-              </a:rPr>
-              <a:t>Omskrivning af projektet</a:t>
-            </a:r>
-          </a:p>
-          <a:p>
-            <a:pPr marL="285750" indent="-285750">
-              <a:buFont typeface="Arial" panose="020B0604020202020204" pitchFamily="34" charset="0"/>
-              <a:buChar char="•"/>
-            </a:pPr>
-            <a:r>
-              <a:rPr lang="da-DK" dirty="0" err="1">
-                <a:solidFill>
-                  <a:schemeClr val="tx1">
-                    <a:lumMod val="85000"/>
-                    <a:lumOff val="15000"/>
-                  </a:schemeClr>
-                </a:solidFill>
-              </a:rPr>
-              <a:t>Trello</a:t>
-            </a:r>
-            <a:r>
-              <a:rPr lang="da-DK" dirty="0">
-                <a:solidFill>
-                  <a:schemeClr val="tx1">
-                    <a:lumMod val="85000"/>
-                    <a:lumOff val="15000"/>
-                  </a:schemeClr>
-                </a:solidFill>
-              </a:rPr>
-              <a:t> integration (Source of </a:t>
-            </a:r>
-            <a:r>
-              <a:rPr lang="da-DK" dirty="0" err="1">
-                <a:solidFill>
-                  <a:schemeClr val="tx1">
-                    <a:lumMod val="85000"/>
-                    <a:lumOff val="15000"/>
-                  </a:schemeClr>
-                </a:solidFill>
-              </a:rPr>
-              <a:t>Truth</a:t>
-            </a:r>
-            <a:r>
-              <a:rPr lang="da-DK" dirty="0">
-                <a:solidFill>
-                  <a:schemeClr val="tx1">
-                    <a:lumMod val="85000"/>
-                    <a:lumOff val="15000"/>
-                  </a:schemeClr>
-                </a:solidFill>
-              </a:rPr>
-              <a:t>)</a:t>
-            </a:r>
-          </a:p>
-          <a:p>
-            <a:pPr marL="285750" indent="-285750">
-              <a:buFont typeface="Arial" panose="020B0604020202020204" pitchFamily="34" charset="0"/>
-              <a:buChar char="•"/>
-            </a:pPr>
-            <a:r>
-              <a:rPr lang="da-DK" dirty="0">
-                <a:solidFill>
-                  <a:schemeClr val="tx1">
-                    <a:lumMod val="85000"/>
-                    <a:lumOff val="15000"/>
-                  </a:schemeClr>
-                </a:solidFill>
-              </a:rPr>
-              <a:t>Analyse &amp; personlig snak med Engestofte Gods</a:t>
-            </a:r>
-          </a:p>
-          <a:p>
-            <a:pPr marL="285750" indent="-285750">
-              <a:buFont typeface="Arial" panose="020B0604020202020204" pitchFamily="34" charset="0"/>
-              <a:buChar char="•"/>
-            </a:pPr>
-            <a:r>
-              <a:rPr lang="da-DK" dirty="0">
-                <a:solidFill>
-                  <a:schemeClr val="tx1">
-                    <a:lumMod val="85000"/>
-                    <a:lumOff val="15000"/>
-                  </a:schemeClr>
-                </a:solidFill>
-              </a:rPr>
-              <a:t>Integration af tests &amp; håndtering heraf</a:t>
-            </a:r>
-          </a:p>
-          <a:p>
-            <a:pPr marL="285750" indent="-285750">
-              <a:buFont typeface="Arial" panose="020B0604020202020204" pitchFamily="34" charset="0"/>
-              <a:buChar char="•"/>
-            </a:pPr>
-            <a:r>
-              <a:rPr lang="da-DK" dirty="0">
-                <a:solidFill>
-                  <a:schemeClr val="tx1">
-                    <a:lumMod val="85000"/>
-                    <a:lumOff val="15000"/>
-                  </a:schemeClr>
-                </a:solidFill>
-              </a:rPr>
-              <a:t>Langsom integration for at mindste påvirkning af kunder</a:t>
-            </a:r>
-          </a:p>
-          <a:p>
-            <a:pPr marL="285750" indent="-285750">
-              <a:buFont typeface="Arial" panose="020B0604020202020204" pitchFamily="34" charset="0"/>
-              <a:buChar char="•"/>
-            </a:pPr>
-            <a:r>
-              <a:rPr lang="da-DK" dirty="0">
-                <a:solidFill>
-                  <a:schemeClr val="tx1">
-                    <a:lumMod val="85000"/>
-                    <a:lumOff val="15000"/>
-                  </a:schemeClr>
-                </a:solidFill>
-              </a:rPr>
-              <a:t>Data, analyse, estimeret omkostninger osv.</a:t>
-            </a:r>
-          </a:p>
-          <a:p>
-            <a:pPr marL="285750" indent="-285750">
-              <a:buFont typeface="Arial" panose="020B0604020202020204" pitchFamily="34" charset="0"/>
-              <a:buChar char="•"/>
-            </a:pPr>
-            <a:endParaRPr lang="da-DK" dirty="0">
-              <a:solidFill>
-                <a:schemeClr val="tx1">
-                  <a:lumMod val="85000"/>
-                  <a:lumOff val="15000"/>
-                </a:schemeClr>
-              </a:solidFill>
-            </a:endParaRPr>
-          </a:p>
-          <a:p>
-            <a:endParaRPr lang="da-DK" dirty="0">
-              <a:solidFill>
-                <a:schemeClr val="tx1">
-                  <a:lumMod val="85000"/>
-                  <a:lumOff val="15000"/>
-                </a:schemeClr>
-              </a:solidFill>
-            </a:endParaRPr>
-          </a:p>
-          <a:p>
-            <a:endParaRPr lang="da-DK" dirty="0">
-              <a:solidFill>
-                <a:schemeClr val="tx1">
-                  <a:lumMod val="85000"/>
-                  <a:lumOff val="15000"/>
-                </a:schemeClr>
-              </a:solidFill>
-            </a:endParaRPr>
-          </a:p>
-          <a:p>
-            <a:endParaRPr lang="da-DK" dirty="0">
-              <a:solidFill>
-                <a:schemeClr val="tx1">
-                  <a:lumMod val="85000"/>
-                  <a:lumOff val="15000"/>
-                </a:schemeClr>
-              </a:solidFill>
-            </a:endParaRPr>
-          </a:p>
-          <a:p>
-            <a:endParaRPr lang="es-ES" dirty="0">
-              <a:solidFill>
-                <a:schemeClr val="tx1">
-                  <a:lumMod val="85000"/>
-                  <a:lumOff val="15000"/>
-                </a:schemeClr>
-              </a:solidFill>
-            </a:endParaRPr>
-          </a:p>
-        </p:txBody>
-      </p:sp>
-      <p:sp>
-        <p:nvSpPr>
-          <p:cNvPr id="8" name="Tekstfelt 7">
-            <a:extLst>
-              <a:ext uri="{FF2B5EF4-FFF2-40B4-BE49-F238E27FC236}">
-                <a16:creationId xmlns:a16="http://schemas.microsoft.com/office/drawing/2014/main" id="{B63543B3-DBDF-0A31-1371-A44237319520}"/>
-              </a:ext>
-            </a:extLst>
-          </p:cNvPr>
-          <p:cNvSpPr txBox="1"/>
-          <p:nvPr/>
-        </p:nvSpPr>
-        <p:spPr>
-          <a:xfrm>
-            <a:off x="6378060" y="1658405"/>
-            <a:ext cx="2737064" cy="1754326"/>
-          </a:xfrm>
-          <a:prstGeom prst="rect">
-            <a:avLst/>
-          </a:prstGeom>
-          <a:noFill/>
-        </p:spPr>
-        <p:txBody>
-          <a:bodyPr wrap="square" rtlCol="0">
-            <a:spAutoFit/>
-          </a:bodyPr>
-          <a:lstStyle/>
-          <a:p>
-            <a:r>
-              <a:rPr lang="da-DK" b="1" dirty="0">
-                <a:solidFill>
-                  <a:schemeClr val="tx1">
-                    <a:lumMod val="85000"/>
-                    <a:lumOff val="15000"/>
-                  </a:schemeClr>
-                </a:solidFill>
-              </a:rPr>
-              <a:t>Personlig fremtid</a:t>
-            </a:r>
-          </a:p>
-          <a:p>
-            <a:endParaRPr lang="da-DK" dirty="0">
-              <a:solidFill>
-                <a:schemeClr val="tx1">
-                  <a:lumMod val="85000"/>
-                  <a:lumOff val="15000"/>
-                </a:schemeClr>
-              </a:solidFill>
-            </a:endParaRPr>
-          </a:p>
-          <a:p>
-            <a:endParaRPr lang="da-DK" dirty="0">
-              <a:solidFill>
-                <a:schemeClr val="tx1">
-                  <a:lumMod val="85000"/>
-                  <a:lumOff val="15000"/>
-                </a:schemeClr>
-              </a:solidFill>
-            </a:endParaRPr>
-          </a:p>
-          <a:p>
-            <a:endParaRPr lang="da-DK" dirty="0">
-              <a:solidFill>
-                <a:schemeClr val="tx1">
-                  <a:lumMod val="85000"/>
-                  <a:lumOff val="15000"/>
-                </a:schemeClr>
-              </a:solidFill>
-            </a:endParaRPr>
-          </a:p>
-          <a:p>
-            <a:endParaRPr lang="da-DK" dirty="0">
-              <a:solidFill>
-                <a:schemeClr val="tx1">
-                  <a:lumMod val="85000"/>
-                  <a:lumOff val="15000"/>
-                </a:schemeClr>
-              </a:solidFill>
-            </a:endParaRPr>
-          </a:p>
-          <a:p>
-            <a:endParaRPr lang="es-ES" dirty="0">
-              <a:solidFill>
-                <a:schemeClr val="tx1">
-                  <a:lumMod val="85000"/>
-                  <a:lumOff val="15000"/>
-                </a:schemeClr>
-              </a:solidFill>
-            </a:endParaRPr>
-          </a:p>
-        </p:txBody>
-      </p:sp>
-      <p:sp>
-        <p:nvSpPr>
-          <p:cNvPr id="14" name="Tekstfelt 13">
-            <a:extLst>
-              <a:ext uri="{FF2B5EF4-FFF2-40B4-BE49-F238E27FC236}">
-                <a16:creationId xmlns:a16="http://schemas.microsoft.com/office/drawing/2014/main" id="{18FD6983-E35C-C2BB-1CDD-F14E05E37C41}"/>
-              </a:ext>
-            </a:extLst>
-          </p:cNvPr>
-          <p:cNvSpPr txBox="1"/>
-          <p:nvPr/>
-        </p:nvSpPr>
-        <p:spPr>
-          <a:xfrm>
-            <a:off x="6360153" y="2079902"/>
-            <a:ext cx="4995513" cy="2308324"/>
-          </a:xfrm>
-          <a:prstGeom prst="rect">
-            <a:avLst/>
-          </a:prstGeom>
-          <a:noFill/>
-        </p:spPr>
-        <p:txBody>
-          <a:bodyPr wrap="square" rtlCol="0">
-            <a:spAutoFit/>
-          </a:bodyPr>
-          <a:lstStyle/>
-          <a:p>
-            <a:pPr marL="285750" indent="-285750">
-              <a:buFont typeface="Arial" panose="020B0604020202020204" pitchFamily="34" charset="0"/>
-              <a:buChar char="•"/>
-            </a:pPr>
-            <a:r>
-              <a:rPr lang="da-DK" dirty="0">
-                <a:solidFill>
-                  <a:schemeClr val="tx1">
-                    <a:lumMod val="85000"/>
-                    <a:lumOff val="15000"/>
-                  </a:schemeClr>
-                </a:solidFill>
-              </a:rPr>
-              <a:t>Håber AI hype kommer lidt ned</a:t>
-            </a:r>
-          </a:p>
-          <a:p>
-            <a:pPr marL="285750" indent="-285750">
-              <a:buFont typeface="Arial" panose="020B0604020202020204" pitchFamily="34" charset="0"/>
-              <a:buChar char="•"/>
-            </a:pPr>
-            <a:r>
-              <a:rPr lang="da-DK" dirty="0">
-                <a:solidFill>
-                  <a:schemeClr val="tx1">
-                    <a:lumMod val="85000"/>
-                    <a:lumOff val="15000"/>
-                  </a:schemeClr>
-                </a:solidFill>
-              </a:rPr>
-              <a:t>Kodning er sjovt - </a:t>
-            </a:r>
-            <a:r>
-              <a:rPr lang="da-DK" dirty="0" err="1">
-                <a:solidFill>
-                  <a:schemeClr val="tx1">
-                    <a:lumMod val="85000"/>
-                    <a:lumOff val="15000"/>
-                  </a:schemeClr>
-                </a:solidFill>
-              </a:rPr>
-              <a:t>prompting</a:t>
-            </a:r>
-            <a:r>
-              <a:rPr lang="da-DK" dirty="0">
-                <a:solidFill>
-                  <a:schemeClr val="tx1">
-                    <a:lumMod val="85000"/>
-                    <a:lumOff val="15000"/>
-                  </a:schemeClr>
-                </a:solidFill>
-              </a:rPr>
-              <a:t> er ikke…</a:t>
-            </a:r>
-          </a:p>
-          <a:p>
-            <a:pPr marL="285750" indent="-285750">
-              <a:buFont typeface="Arial" panose="020B0604020202020204" pitchFamily="34" charset="0"/>
-              <a:buChar char="•"/>
-            </a:pPr>
-            <a:r>
-              <a:rPr lang="da-DK" dirty="0">
-                <a:solidFill>
-                  <a:schemeClr val="tx1">
-                    <a:lumMod val="85000"/>
-                    <a:lumOff val="15000"/>
-                  </a:schemeClr>
-                </a:solidFill>
-              </a:rPr>
-              <a:t>Old School start på HTX</a:t>
-            </a:r>
-          </a:p>
-          <a:p>
-            <a:pPr marL="285750" indent="-285750">
-              <a:buFont typeface="Arial" panose="020B0604020202020204" pitchFamily="34" charset="0"/>
-              <a:buChar char="•"/>
-            </a:pPr>
-            <a:r>
-              <a:rPr lang="da-DK" dirty="0">
-                <a:solidFill>
-                  <a:schemeClr val="tx1">
-                    <a:lumMod val="85000"/>
-                    <a:lumOff val="15000"/>
-                  </a:schemeClr>
-                </a:solidFill>
-              </a:rPr>
-              <a:t>Effektiv brug af AI fremfor AI som løsning</a:t>
-            </a:r>
-          </a:p>
-          <a:p>
-            <a:pPr marL="285750" indent="-285750">
-              <a:buFont typeface="Arial" panose="020B0604020202020204" pitchFamily="34" charset="0"/>
-              <a:buChar char="•"/>
-            </a:pPr>
-            <a:r>
-              <a:rPr lang="da-DK" dirty="0">
-                <a:solidFill>
-                  <a:schemeClr val="tx1">
-                    <a:lumMod val="85000"/>
-                    <a:lumOff val="15000"/>
-                  </a:schemeClr>
-                </a:solidFill>
-              </a:rPr>
-              <a:t>Bedre forståelse for hvordan AI kan integreres i virksomheder</a:t>
-            </a:r>
-          </a:p>
-          <a:p>
-            <a:pPr marL="285750" indent="-285750">
-              <a:buFont typeface="Arial" panose="020B0604020202020204" pitchFamily="34" charset="0"/>
-              <a:buChar char="•"/>
-            </a:pPr>
-            <a:endParaRPr lang="da-DK" dirty="0">
-              <a:solidFill>
-                <a:schemeClr val="tx1">
-                  <a:lumMod val="85000"/>
-                  <a:lumOff val="15000"/>
-                </a:schemeClr>
-              </a:solidFill>
-            </a:endParaRPr>
-          </a:p>
-          <a:p>
-            <a:pPr marL="285750" indent="-285750">
-              <a:buFont typeface="Arial" panose="020B0604020202020204" pitchFamily="34" charset="0"/>
-              <a:buChar char="•"/>
-            </a:pPr>
-            <a:endParaRPr lang="da-DK" dirty="0">
-              <a:solidFill>
-                <a:schemeClr val="tx1">
-                  <a:lumMod val="85000"/>
-                  <a:lumOff val="15000"/>
-                </a:schemeClr>
-              </a:solidFill>
-            </a:endParaRPr>
-          </a:p>
-        </p:txBody>
-      </p:sp>
-      <p:pic>
-        <p:nvPicPr>
-          <p:cNvPr id="4" name="Billede 3">
-            <a:extLst>
-              <a:ext uri="{FF2B5EF4-FFF2-40B4-BE49-F238E27FC236}">
-                <a16:creationId xmlns:a16="http://schemas.microsoft.com/office/drawing/2014/main" id="{46C48863-F7B3-A655-823A-69A38760F37D}"/>
-              </a:ext>
-            </a:extLst>
-          </p:cNvPr>
-          <p:cNvPicPr>
-            <a:picLocks noChangeAspect="1"/>
-          </p:cNvPicPr>
-          <p:nvPr/>
-        </p:nvPicPr>
-        <p:blipFill>
-          <a:blip r:embed="rId2"/>
-          <a:stretch>
-            <a:fillRect/>
-          </a:stretch>
-        </p:blipFill>
-        <p:spPr>
-          <a:xfrm>
-            <a:off x="5557620" y="3769062"/>
-            <a:ext cx="4847289" cy="2592456"/>
-          </a:xfrm>
-          <a:prstGeom prst="rect">
-            <a:avLst/>
-          </a:prstGeom>
-        </p:spPr>
-      </p:pic>
-    </p:spTree>
-    <p:extLst>
-      <p:ext uri="{BB962C8B-B14F-4D97-AF65-F5344CB8AC3E}">
-        <p14:creationId xmlns:p14="http://schemas.microsoft.com/office/powerpoint/2010/main" val="18316513"/>
       </p:ext>
     </p:extLst>
   </p:cSld>

--- a/exam/exam.pptx
+++ b/exam/exam.pptx
@@ -4012,7 +4012,7 @@
         <p:spPr>
           <a:xfrm>
             <a:off x="6378060" y="1658405"/>
-            <a:ext cx="1212783" cy="1754326"/>
+            <a:ext cx="1890041" cy="1754326"/>
           </a:xfrm>
           <a:prstGeom prst="rect">
             <a:avLst/>
@@ -4034,7 +4034,7 @@
                   </a:schemeClr>
                 </a:solidFill>
               </a:rPr>
-              <a:t>Dårligt</a:t>
+              <a:t>Mindre godt</a:t>
             </a:r>
           </a:p>
           <a:p>
@@ -4198,7 +4198,7 @@
                   </a:schemeClr>
                 </a:solidFill>
               </a:rPr>
-              <a:t>Systemudvikling</a:t>
+              <a:t>Systemudvikling (1-mandsgruppe også)</a:t>
             </a:r>
           </a:p>
           <a:p>
